--- a/chapter1/clips/clip-06-uses-of-datasets/clip.pptx
+++ b/chapter1/clips/clip-06-uses-of-datasets/clip.pptx
@@ -9,10 +9,9 @@
     <p:sldId id="257" r:id="rId8"/>
     <p:sldId id="258" r:id="rId9"/>
     <p:sldId id="259" r:id="rId10"/>
-    <p:sldId id="260" r:id="rId11"/>
-    <p:sldId id="261" r:id="rId12"/>
-    <p:sldId id="262" r:id="rId13"/>
-    <p:sldId id="263" r:id="rId14"/>
+    <p:sldId id="260" r:id="rId12"/>
+    <p:sldId id="261" r:id="rId13"/>
+    <p:sldId id="262" r:id="rId14"/>
   </p:sldIdLst>
   <p:sldSz cx="12191695" cy="6858000" type="screen4x3"/>
   <p:notesSz cx="6858000" cy="9144000"/>
@@ -112,6 +111,516 @@
     </a:lvl9pPr>
   </p:defaultTextStyle>
 </p:presentation>
+</file>
+
+<file path=ppt/notesMasters/notesMaster1.xml><?xml version="1.0" encoding="utf-8"?>
+<p:notesMaster xmlns:a="http://schemas.openxmlformats.org/drawingml/2006/main" xmlns:p="http://schemas.openxmlformats.org/presentationml/2006/main" xmlns:r="http://schemas.openxmlformats.org/officeDocument/2006/relationships">
+  <p:cSld>
+    <p:bg>
+      <p:bgRef idx="1001">
+        <a:schemeClr val="bg1"/>
+      </p:bgRef>
+    </p:bg>
+    <p:spTree>
+      <p:nvGrpSpPr>
+        <p:cNvPr id="1" name=""/>
+        <p:cNvGrpSpPr/>
+        <p:nvPr/>
+      </p:nvGrpSpPr>
+      <p:grpSpPr>
+        <a:xfrm>
+          <a:off x="0" y="0"/>
+          <a:ext cx="0" cy="0"/>
+          <a:chOff x="0" y="0"/>
+          <a:chExt cx="0" cy="0"/>
+        </a:xfrm>
+      </p:grpSpPr>
+      <p:sp>
+        <p:nvSpPr>
+          <p:cNvPr id="2" name="Header Placeholder 1"/>
+          <p:cNvSpPr>
+            <a:spLocks noGrp="1"/>
+          </p:cNvSpPr>
+          <p:nvPr>
+            <p:ph type="hdr" sz="quarter"/>
+          </p:nvPr>
+        </p:nvSpPr>
+        <p:spPr>
+          <a:xfrm>
+            <a:off x="0" y="0"/>
+            <a:ext cx="2971800" cy="457200"/>
+          </a:xfrm>
+          <a:prstGeom prst="rect">
+            <a:avLst/>
+          </a:prstGeom>
+        </p:spPr>
+        <p:txBody>
+          <a:bodyPr vert="horz" lIns="91440" tIns="45720" rIns="91440" bIns="45720" rtlCol="0"/>
+          <a:lstStyle>
+            <a:lvl1pPr algn="l">
+              <a:defRPr sz="1200"/>
+            </a:lvl1pPr>
+          </a:lstStyle>
+          <a:p>
+            <a:endParaRPr lang="en-US"/>
+          </a:p>
+        </p:txBody>
+      </p:sp>
+      <p:sp>
+        <p:nvSpPr>
+          <p:cNvPr id="3" name="Date Placeholder 2"/>
+          <p:cNvSpPr>
+            <a:spLocks noGrp="1"/>
+          </p:cNvSpPr>
+          <p:nvPr>
+            <p:ph type="dt" idx="1"/>
+          </p:nvPr>
+        </p:nvSpPr>
+        <p:spPr>
+          <a:xfrm>
+            <a:off x="3884613" y="0"/>
+            <a:ext cx="2971800" cy="457200"/>
+          </a:xfrm>
+          <a:prstGeom prst="rect">
+            <a:avLst/>
+          </a:prstGeom>
+        </p:spPr>
+        <p:txBody>
+          <a:bodyPr vert="horz" lIns="91440" tIns="45720" rIns="91440" bIns="45720" rtlCol="0"/>
+          <a:lstStyle>
+            <a:lvl1pPr algn="r">
+              <a:defRPr sz="1200"/>
+            </a:lvl1pPr>
+          </a:lstStyle>
+          <a:p>
+            <a:fld id="{0F89C1C7-3DCD-1040-A9CF-14679D8B5DDD}" type="datetimeFigureOut">
+              <a:rPr lang="en-US" smtClean="0"/>
+              <a:t>10/17/16</a:t>
+            </a:fld>
+            <a:endParaRPr lang="en-US"/>
+          </a:p>
+        </p:txBody>
+      </p:sp>
+      <p:sp>
+        <p:nvSpPr>
+          <p:cNvPr id="4" name="Slide Image Placeholder 3"/>
+          <p:cNvSpPr>
+            <a:spLocks noGrp="1" noRot="1" noChangeAspect="1"/>
+          </p:cNvSpPr>
+          <p:nvPr>
+            <p:ph type="sldImg" idx="2"/>
+          </p:nvPr>
+        </p:nvSpPr>
+        <p:spPr>
+          <a:xfrm>
+            <a:off x="1143000" y="685800"/>
+            <a:ext cx="4572000" cy="3429000"/>
+          </a:xfrm>
+          <a:prstGeom prst="rect">
+            <a:avLst/>
+          </a:prstGeom>
+          <a:noFill/>
+          <a:ln w="12700">
+            <a:solidFill>
+              <a:prstClr val="black"/>
+            </a:solidFill>
+          </a:ln>
+        </p:spPr>
+        <p:txBody>
+          <a:bodyPr vert="horz" lIns="91440" tIns="45720" rIns="91440" bIns="45720" rtlCol="0" anchor="ctr"/>
+          <a:lstStyle/>
+          <a:p>
+            <a:endParaRPr lang="en-US"/>
+          </a:p>
+        </p:txBody>
+      </p:sp>
+      <p:sp>
+        <p:nvSpPr>
+          <p:cNvPr id="5" name="Notes Placeholder 4"/>
+          <p:cNvSpPr>
+            <a:spLocks noGrp="1"/>
+          </p:cNvSpPr>
+          <p:nvPr>
+            <p:ph type="body" sz="quarter" idx="3"/>
+          </p:nvPr>
+        </p:nvSpPr>
+        <p:spPr>
+          <a:xfrm>
+            <a:off x="685800" y="4343400"/>
+            <a:ext cx="5486400" cy="4114800"/>
+          </a:xfrm>
+          <a:prstGeom prst="rect">
+            <a:avLst/>
+          </a:prstGeom>
+        </p:spPr>
+        <p:txBody>
+          <a:bodyPr vert="horz" lIns="91440" tIns="45720" rIns="91440" bIns="45720" rtlCol="0"/>
+          <a:lstStyle/>
+          <a:p>
+            <a:pPr lvl="0"/>
+            <a:r>
+              <a:rPr lang="en-US" smtClean="0"/>
+              <a:t>Click to edit Master text styles</a:t>
+            </a:r>
+          </a:p>
+          <a:p>
+            <a:pPr lvl="1"/>
+            <a:r>
+              <a:rPr lang="en-US" smtClean="0"/>
+              <a:t>Second level</a:t>
+            </a:r>
+          </a:p>
+          <a:p>
+            <a:pPr lvl="2"/>
+            <a:r>
+              <a:rPr lang="en-US" smtClean="0"/>
+              <a:t>Third level</a:t>
+            </a:r>
+          </a:p>
+          <a:p>
+            <a:pPr lvl="3"/>
+            <a:r>
+              <a:rPr lang="en-US" smtClean="0"/>
+              <a:t>Fourth level</a:t>
+            </a:r>
+          </a:p>
+          <a:p>
+            <a:pPr lvl="4"/>
+            <a:r>
+              <a:rPr lang="en-US" smtClean="0"/>
+              <a:t>Fifth level</a:t>
+            </a:r>
+            <a:endParaRPr lang="en-US"/>
+          </a:p>
+        </p:txBody>
+      </p:sp>
+      <p:sp>
+        <p:nvSpPr>
+          <p:cNvPr id="6" name="Footer Placeholder 5"/>
+          <p:cNvSpPr>
+            <a:spLocks noGrp="1"/>
+          </p:cNvSpPr>
+          <p:nvPr>
+            <p:ph type="ftr" sz="quarter" idx="4"/>
+          </p:nvPr>
+        </p:nvSpPr>
+        <p:spPr>
+          <a:xfrm>
+            <a:off x="0" y="8685213"/>
+            <a:ext cx="2971800" cy="457200"/>
+          </a:xfrm>
+          <a:prstGeom prst="rect">
+            <a:avLst/>
+          </a:prstGeom>
+        </p:spPr>
+        <p:txBody>
+          <a:bodyPr vert="horz" lIns="91440" tIns="45720" rIns="91440" bIns="45720" rtlCol="0" anchor="b"/>
+          <a:lstStyle>
+            <a:lvl1pPr algn="l">
+              <a:defRPr sz="1200"/>
+            </a:lvl1pPr>
+          </a:lstStyle>
+          <a:p>
+            <a:endParaRPr lang="en-US"/>
+          </a:p>
+        </p:txBody>
+      </p:sp>
+      <p:sp>
+        <p:nvSpPr>
+          <p:cNvPr id="7" name="Slide Number Placeholder 6"/>
+          <p:cNvSpPr>
+            <a:spLocks noGrp="1"/>
+          </p:cNvSpPr>
+          <p:nvPr>
+            <p:ph type="sldNum" sz="quarter" idx="5"/>
+          </p:nvPr>
+        </p:nvSpPr>
+        <p:spPr>
+          <a:xfrm>
+            <a:off x="3884613" y="8685213"/>
+            <a:ext cx="2971800" cy="457200"/>
+          </a:xfrm>
+          <a:prstGeom prst="rect">
+            <a:avLst/>
+          </a:prstGeom>
+        </p:spPr>
+        <p:txBody>
+          <a:bodyPr vert="horz" lIns="91440" tIns="45720" rIns="91440" bIns="45720" rtlCol="0" anchor="b"/>
+          <a:lstStyle>
+            <a:lvl1pPr algn="r">
+              <a:defRPr sz="1200"/>
+            </a:lvl1pPr>
+          </a:lstStyle>
+          <a:p>
+            <a:fld id="{BB5E49A5-4136-284D-997B-48E1D791AD67}" type="slidenum">
+              <a:rPr lang="en-US" smtClean="0"/>
+              <a:t>‹#›</a:t>
+            </a:fld>
+            <a:endParaRPr lang="en-US"/>
+          </a:p>
+        </p:txBody>
+      </p:sp>
+    </p:spTree>
+    <p:extLst>
+      <p:ext uri="{BB962C8B-B14F-4D97-AF65-F5344CB8AC3E}">
+        <p14:creationId xmlns:p14="http://schemas.microsoft.com/office/powerpoint/2010/main" val="2623252185"/>
+      </p:ext>
+    </p:extLst>
+  </p:cSld>
+  <p:clrMap bg1="lt1" tx1="dk1" bg2="lt2" tx2="dk2" accent1="accent1" accent2="accent2" accent3="accent3" accent4="accent4" accent5="accent5" accent6="accent6" hlink="hlink" folHlink="folHlink"/>
+  <p:notesStyle>
+    <a:lvl1pPr marL="0" algn="l" defTabSz="457200" rtl="0" eaLnBrk="1" latinLnBrk="0" hangingPunct="1">
+      <a:defRPr sz="1200" kern="1200">
+        <a:solidFill>
+          <a:schemeClr val="tx1"/>
+        </a:solidFill>
+        <a:latin typeface="+mn-lt"/>
+        <a:ea typeface="+mn-ea"/>
+        <a:cs typeface="+mn-cs"/>
+      </a:defRPr>
+    </a:lvl1pPr>
+    <a:lvl2pPr marL="457200" algn="l" defTabSz="457200" rtl="0" eaLnBrk="1" latinLnBrk="0" hangingPunct="1">
+      <a:defRPr sz="1200" kern="1200">
+        <a:solidFill>
+          <a:schemeClr val="tx1"/>
+        </a:solidFill>
+        <a:latin typeface="+mn-lt"/>
+        <a:ea typeface="+mn-ea"/>
+        <a:cs typeface="+mn-cs"/>
+      </a:defRPr>
+    </a:lvl2pPr>
+    <a:lvl3pPr marL="914400" algn="l" defTabSz="457200" rtl="0" eaLnBrk="1" latinLnBrk="0" hangingPunct="1">
+      <a:defRPr sz="1200" kern="1200">
+        <a:solidFill>
+          <a:schemeClr val="tx1"/>
+        </a:solidFill>
+        <a:latin typeface="+mn-lt"/>
+        <a:ea typeface="+mn-ea"/>
+        <a:cs typeface="+mn-cs"/>
+      </a:defRPr>
+    </a:lvl3pPr>
+    <a:lvl4pPr marL="1371600" algn="l" defTabSz="457200" rtl="0" eaLnBrk="1" latinLnBrk="0" hangingPunct="1">
+      <a:defRPr sz="1200" kern="1200">
+        <a:solidFill>
+          <a:schemeClr val="tx1"/>
+        </a:solidFill>
+        <a:latin typeface="+mn-lt"/>
+        <a:ea typeface="+mn-ea"/>
+        <a:cs typeface="+mn-cs"/>
+      </a:defRPr>
+    </a:lvl4pPr>
+    <a:lvl5pPr marL="1828800" algn="l" defTabSz="457200" rtl="0" eaLnBrk="1" latinLnBrk="0" hangingPunct="1">
+      <a:defRPr sz="1200" kern="1200">
+        <a:solidFill>
+          <a:schemeClr val="tx1"/>
+        </a:solidFill>
+        <a:latin typeface="+mn-lt"/>
+        <a:ea typeface="+mn-ea"/>
+        <a:cs typeface="+mn-cs"/>
+      </a:defRPr>
+    </a:lvl5pPr>
+    <a:lvl6pPr marL="2286000" algn="l" defTabSz="457200" rtl="0" eaLnBrk="1" latinLnBrk="0" hangingPunct="1">
+      <a:defRPr sz="1200" kern="1200">
+        <a:solidFill>
+          <a:schemeClr val="tx1"/>
+        </a:solidFill>
+        <a:latin typeface="+mn-lt"/>
+        <a:ea typeface="+mn-ea"/>
+        <a:cs typeface="+mn-cs"/>
+      </a:defRPr>
+    </a:lvl6pPr>
+    <a:lvl7pPr marL="2743200" algn="l" defTabSz="457200" rtl="0" eaLnBrk="1" latinLnBrk="0" hangingPunct="1">
+      <a:defRPr sz="1200" kern="1200">
+        <a:solidFill>
+          <a:schemeClr val="tx1"/>
+        </a:solidFill>
+        <a:latin typeface="+mn-lt"/>
+        <a:ea typeface="+mn-ea"/>
+        <a:cs typeface="+mn-cs"/>
+      </a:defRPr>
+    </a:lvl7pPr>
+    <a:lvl8pPr marL="3200400" algn="l" defTabSz="457200" rtl="0" eaLnBrk="1" latinLnBrk="0" hangingPunct="1">
+      <a:defRPr sz="1200" kern="1200">
+        <a:solidFill>
+          <a:schemeClr val="tx1"/>
+        </a:solidFill>
+        <a:latin typeface="+mn-lt"/>
+        <a:ea typeface="+mn-ea"/>
+        <a:cs typeface="+mn-cs"/>
+      </a:defRPr>
+    </a:lvl8pPr>
+    <a:lvl9pPr marL="3657600" algn="l" defTabSz="457200" rtl="0" eaLnBrk="1" latinLnBrk="0" hangingPunct="1">
+      <a:defRPr sz="1200" kern="1200">
+        <a:solidFill>
+          <a:schemeClr val="tx1"/>
+        </a:solidFill>
+        <a:latin typeface="+mn-lt"/>
+        <a:ea typeface="+mn-ea"/>
+        <a:cs typeface="+mn-cs"/>
+      </a:defRPr>
+    </a:lvl9pPr>
+  </p:notesStyle>
+</p:notesMaster>
+</file>
+
+<file path=ppt/notesSlides/notesSlide1.xml><?xml version="1.0" encoding="utf-8"?>
+<p:notes xmlns:a="http://schemas.openxmlformats.org/drawingml/2006/main" xmlns:p="http://schemas.openxmlformats.org/presentationml/2006/main" xmlns:r="http://schemas.openxmlformats.org/officeDocument/2006/relationships">
+  <p:cSld>
+    <p:spTree>
+      <p:nvGrpSpPr>
+        <p:cNvPr id="1" name=""/>
+        <p:cNvGrpSpPr/>
+        <p:nvPr/>
+      </p:nvGrpSpPr>
+      <p:grpSpPr>
+        <a:xfrm>
+          <a:off x="0" y="0"/>
+          <a:ext cx="0" cy="0"/>
+          <a:chOff x="0" y="0"/>
+          <a:chExt cx="0" cy="0"/>
+        </a:xfrm>
+      </p:grpSpPr>
+      <p:sp>
+        <p:nvSpPr>
+          <p:cNvPr id="2" name="Slide Image Placeholder 1"/>
+          <p:cNvSpPr>
+            <a:spLocks noGrp="1"/>
+          </p:cNvSpPr>
+          <p:nvPr>
+            <p:ph type="sldImg" idx="2"/>
+          </p:nvPr>
+        </p:nvSpPr>
+        <p:spPr/>
+      </p:sp>
+      <p:sp>
+        <p:nvSpPr>
+          <p:cNvPr id="3" name="Notes Placeholder 2"/>
+          <p:cNvSpPr>
+            <a:spLocks noGrp="1"/>
+          </p:cNvSpPr>
+          <p:nvPr>
+            <p:ph type="body" idx="3" sz="quarter"/>
+          </p:nvPr>
+        </p:nvSpPr>
+        <p:spPr/>
+        <p:txBody>
+          <a:bodyPr/>
+          <a:lstStyle/>
+          <a:p>
+            <a:r>
+              <a:t>Setting: one row per order (customer, category, date, amount)</a:t>
+            </a:r>
+          </a:p>
+          <a:p>
+            <a:r>
+              <a:t>Key idea: aggregates reveal repurchase rhythms</a:t>
+            </a:r>
+          </a:p>
+          <a:p>
+            <a:r>
+              <a:t>Drives segmentation and promotional calendars</a:t>
+            </a:r>
+          </a:p>
+        </p:txBody>
+      </p:sp>
+      <p:sp>
+        <p:nvSpPr>
+          <p:cNvPr id="4" name="Slide Number Placeholder 3"/>
+          <p:cNvSpPr>
+            <a:spLocks noGrp="1"/>
+          </p:cNvSpPr>
+          <p:nvPr>
+            <p:ph type="sldNum" idx="5" sz="quarter"/>
+          </p:nvPr>
+        </p:nvSpPr>
+        <p:spPr/>
+      </p:sp>
+    </p:spTree>
+  </p:cSld>
+  <p:clrMapOvr>
+    <a:masterClrMapping/>
+  </p:clrMapOvr>
+</p:notes>
+</file>
+
+<file path=ppt/notesSlides/notesSlide2.xml><?xml version="1.0" encoding="utf-8"?>
+<p:notes xmlns:a="http://schemas.openxmlformats.org/drawingml/2006/main" xmlns:p="http://schemas.openxmlformats.org/presentationml/2006/main" xmlns:r="http://schemas.openxmlformats.org/officeDocument/2006/relationships">
+  <p:cSld>
+    <p:spTree>
+      <p:nvGrpSpPr>
+        <p:cNvPr id="1" name=""/>
+        <p:cNvGrpSpPr/>
+        <p:nvPr/>
+      </p:nvGrpSpPr>
+      <p:grpSpPr>
+        <a:xfrm>
+          <a:off x="0" y="0"/>
+          <a:ext cx="0" cy="0"/>
+          <a:chOff x="0" y="0"/>
+          <a:chExt cx="0" cy="0"/>
+        </a:xfrm>
+      </p:grpSpPr>
+      <p:sp>
+        <p:nvSpPr>
+          <p:cNvPr id="2" name="Slide Image Placeholder 1"/>
+          <p:cNvSpPr>
+            <a:spLocks noGrp="1"/>
+          </p:cNvSpPr>
+          <p:nvPr>
+            <p:ph type="sldImg" idx="2"/>
+          </p:nvPr>
+        </p:nvSpPr>
+        <p:spPr/>
+      </p:sp>
+      <p:sp>
+        <p:nvSpPr>
+          <p:cNvPr id="3" name="Notes Placeholder 2"/>
+          <p:cNvSpPr>
+            <a:spLocks noGrp="1"/>
+          </p:cNvSpPr>
+          <p:nvPr>
+            <p:ph type="body" idx="3" sz="quarter"/>
+          </p:nvPr>
+        </p:nvSpPr>
+        <p:spPr/>
+        <p:txBody>
+          <a:bodyPr/>
+          <a:lstStyle/>
+          <a:p>
+            <a:r>
+              <a:t>Setting: Python workflow on churn labels</a:t>
+            </a:r>
+          </a:p>
+          <a:p>
+            <a:r>
+              <a:t>Key idea: same arc as fraud or demand forecasting</a:t>
+            </a:r>
+          </a:p>
+          <a:p>
+            <a:r>
+              <a:t>Only labels and cost of errors change by domain</a:t>
+            </a:r>
+          </a:p>
+        </p:txBody>
+      </p:sp>
+      <p:sp>
+        <p:nvSpPr>
+          <p:cNvPr id="4" name="Slide Number Placeholder 3"/>
+          <p:cNvSpPr>
+            <a:spLocks noGrp="1"/>
+          </p:cNvSpPr>
+          <p:nvPr>
+            <p:ph type="sldNum" idx="5" sz="quarter"/>
+          </p:nvPr>
+        </p:nvSpPr>
+        <p:spPr/>
+      </p:sp>
+    </p:spTree>
+  </p:cSld>
+  <p:clrMapOvr>
+    <a:masterClrMapping/>
+  </p:clrMapOvr>
+</p:notes>
 </file>
 
 <file path=ppt/slideLayouts/slideLayout1.xml><?xml version="1.0" encoding="utf-8"?>
@@ -3103,8 +3612,8 @@
         </p:nvSpPr>
         <p:spPr>
           <a:xfrm>
-            <a:off x="548640" y="320040"/>
-            <a:ext cx="11064240" cy="914400"/>
+            <a:off x="548640" y="1828800"/>
+            <a:ext cx="11064240" cy="2743200"/>
           </a:xfrm>
           <a:prstGeom prst="rect">
             <a:avLst/>
@@ -3112,16 +3621,46 @@
           <a:noFill/>
         </p:spPr>
         <p:txBody>
-          <a:bodyPr wrap="none">
-            <a:spAutoFit/>
+          <a:bodyPr wrap="square">
+            <a:noAutofit/>
           </a:bodyPr>
           <a:lstStyle/>
           <a:p>
-            <a:pPr>
-              <a:defRPr sz="3200" b="1"/>
+            <a:pPr algn="ctr">
+              <a:lnSpc>
+                <a:spcPts val="2200"/>
+              </a:lnSpc>
+              <a:spcAft>
+                <a:spcPts val="400"/>
+              </a:spcAft>
             </a:pPr>
             <a:r>
+              <a:rPr sz="4000" b="1">
+                <a:solidFill>
+                  <a:srgbClr val="1A1A2E"/>
+                </a:solidFill>
+                <a:latin typeface="Calibri"/>
+              </a:rPr>
               <a:t>Chapter 1 — Uses of datasets</a:t>
+            </a:r>
+          </a:p>
+          <a:p>
+            <a:pPr algn="ctr">
+              <a:lnSpc>
+                <a:spcPts val="2200"/>
+              </a:lnSpc>
+              <a:spcBef>
+                <a:spcPts val="1400"/>
+              </a:spcBef>
+            </a:pPr>
+            <a:r>
+              <a:rPr sz="2600" b="0">
+                <a:solidFill>
+                  <a:srgbClr val="333333"/>
+                </a:solidFill>
+                <a:latin typeface="Calibri"/>
+              </a:rPr>
+              <a:t>Where datasets create value—and one end-to-end workflow</a:t>
             </a:r>
           </a:p>
         </p:txBody>
@@ -3134,8 +3673,8 @@
         </p:nvSpPr>
         <p:spPr>
           <a:xfrm>
-            <a:off x="731520" y="1280160"/>
-            <a:ext cx="10515600" cy="5029200"/>
+            <a:off x="548640" y="6355080"/>
+            <a:ext cx="11064240" cy="320040"/>
           </a:xfrm>
           <a:prstGeom prst="rect">
             <a:avLst/>
@@ -3144,15 +3683,23 @@
         </p:spPr>
         <p:txBody>
           <a:bodyPr wrap="square">
-            <a:spAutoFit/>
+            <a:noAutofit/>
           </a:bodyPr>
           <a:lstStyle/>
           <a:p>
-            <a:pPr>
-              <a:defRPr sz="2000"/>
+            <a:pPr algn="r">
+              <a:lnSpc>
+                <a:spcPts val="2200"/>
+              </a:lnSpc>
+              <a:defRPr sz="1000" b="0">
+                <a:solidFill>
+                  <a:srgbClr val="666666"/>
+                </a:solidFill>
+                <a:latin typeface="Calibri"/>
+              </a:defRPr>
             </a:pPr>
             <a:r>
-              <a:t>Where datasets create value—and one end-to-end workflow</a:t>
+              <a:t>Chapter 1 — Uses Of Datasets</a:t>
             </a:r>
           </a:p>
         </p:txBody>
@@ -3183,8 +3730,8 @@
         </p:nvSpPr>
         <p:spPr>
           <a:xfrm>
-            <a:off x="548640" y="320040"/>
-            <a:ext cx="11064240" cy="914400"/>
+            <a:off x="548640" y="411480"/>
+            <a:ext cx="11064240" cy="777240"/>
           </a:xfrm>
           <a:prstGeom prst="rect">
             <a:avLst/>
@@ -3192,15 +3739,23 @@
           <a:noFill/>
         </p:spPr>
         <p:txBody>
-          <a:bodyPr wrap="none">
-            <a:spAutoFit/>
+          <a:bodyPr wrap="square">
+            <a:noAutofit/>
           </a:bodyPr>
           <a:lstStyle/>
           <a:p>
             <a:pPr>
-              <a:defRPr sz="3200" b="1"/>
+              <a:lnSpc>
+                <a:spcPts val="2200"/>
+              </a:lnSpc>
             </a:pPr>
             <a:r>
+              <a:rPr sz="2800" b="1">
+                <a:solidFill>
+                  <a:srgbClr val="1A1A2E"/>
+                </a:solidFill>
+                <a:latin typeface="Calibri"/>
+              </a:rPr>
               <a:t>Learning objectives</a:t>
             </a:r>
           </a:p>
@@ -3214,8 +3769,8 @@
         </p:nvSpPr>
         <p:spPr>
           <a:xfrm>
-            <a:off x="731520" y="1280160"/>
-            <a:ext cx="10515600" cy="5029200"/>
+            <a:off x="548640" y="1234440"/>
+            <a:ext cx="11064240" cy="4937760"/>
           </a:xfrm>
           <a:prstGeom prst="rect">
             <a:avLst/>
@@ -3224,31 +3779,122 @@
         </p:spPr>
         <p:txBody>
           <a:bodyPr wrap="square">
-            <a:spAutoFit/>
+            <a:noAutofit/>
           </a:bodyPr>
           <a:lstStyle/>
           <a:p>
             <a:pPr>
-              <a:defRPr sz="2000"/>
+              <a:lnSpc>
+                <a:spcPts val="2200"/>
+              </a:lnSpc>
+              <a:spcAft>
+                <a:spcPts val="1000"/>
+              </a:spcAft>
             </a:pPr>
             <a:r>
-              <a:t>Map sectors to typical datasets and analytical goals</a:t>
+              <a:rPr sz="2000" b="0">
+                <a:solidFill>
+                  <a:srgbClr val="333333"/>
+                </a:solidFill>
+                <a:latin typeface="Calibri"/>
+              </a:rPr>
+              <a:t>• Map sectors to typical datasets and analytical goals</a:t>
             </a:r>
           </a:p>
           <a:p>
             <a:pPr>
-              <a:defRPr sz="2000"/>
+              <a:lnSpc>
+                <a:spcPts val="2200"/>
+              </a:lnSpc>
+              <a:spcAft>
+                <a:spcPts val="1000"/>
+              </a:spcAft>
             </a:pPr>
             <a:r>
-              <a:t>Trace the shared lifecycle: define, assess, explore, act</a:t>
+              <a:rPr sz="2000" b="0">
+                <a:solidFill>
+                  <a:srgbClr val="333333"/>
+                </a:solidFill>
+                <a:latin typeface="Calibri"/>
+              </a:rPr>
+              <a:t>• Trace the shared lifecycle: define, assess, explore,</a:t>
             </a:r>
           </a:p>
           <a:p>
             <a:pPr>
-              <a:defRPr sz="2000"/>
+              <a:lnSpc>
+                <a:spcPts val="2200"/>
+              </a:lnSpc>
+              <a:spcAft>
+                <a:spcPts val="1000"/>
+              </a:spcAft>
             </a:pPr>
             <a:r>
-              <a:t>Outline the customer-churn case study steps</a:t>
+              <a:rPr sz="2000" b="0">
+                <a:solidFill>
+                  <a:srgbClr val="333333"/>
+                </a:solidFill>
+                <a:latin typeface="Calibri"/>
+              </a:rPr>
+              <a:t>      act</a:t>
+            </a:r>
+          </a:p>
+          <a:p>
+            <a:pPr>
+              <a:lnSpc>
+                <a:spcPts val="2200"/>
+              </a:lnSpc>
+              <a:spcAft>
+                <a:spcPts val="1000"/>
+              </a:spcAft>
+            </a:pPr>
+            <a:r>
+              <a:rPr sz="2000" b="0">
+                <a:solidFill>
+                  <a:srgbClr val="333333"/>
+                </a:solidFill>
+                <a:latin typeface="Calibri"/>
+              </a:rPr>
+              <a:t>• Outline the customer-churn case study steps</a:t>
+            </a:r>
+          </a:p>
+        </p:txBody>
+      </p:sp>
+      <p:sp>
+        <p:nvSpPr>
+          <p:cNvPr id="4" name="TextBox 3"/>
+          <p:cNvSpPr txBox="1"/>
+          <p:nvPr/>
+        </p:nvSpPr>
+        <p:spPr>
+          <a:xfrm>
+            <a:off x="548640" y="6355080"/>
+            <a:ext cx="11064240" cy="320040"/>
+          </a:xfrm>
+          <a:prstGeom prst="rect">
+            <a:avLst/>
+          </a:prstGeom>
+          <a:noFill/>
+        </p:spPr>
+        <p:txBody>
+          <a:bodyPr wrap="square">
+            <a:noAutofit/>
+          </a:bodyPr>
+          <a:lstStyle/>
+          <a:p>
+            <a:pPr algn="r">
+              <a:lnSpc>
+                <a:spcPts val="2200"/>
+              </a:lnSpc>
+              <a:defRPr sz="1000" b="0">
+                <a:solidFill>
+                  <a:srgbClr val="666666"/>
+                </a:solidFill>
+                <a:latin typeface="Calibri"/>
+              </a:defRPr>
+            </a:pPr>
+            <a:r>
+              <a:t>Chapter 1 — Uses Of Datasets</a:t>
             </a:r>
           </a:p>
         </p:txBody>
@@ -3279,8 +3925,8 @@
         </p:nvSpPr>
         <p:spPr>
           <a:xfrm>
-            <a:off x="548640" y="320040"/>
-            <a:ext cx="11064240" cy="914400"/>
+            <a:off x="548640" y="411480"/>
+            <a:ext cx="11064240" cy="777240"/>
           </a:xfrm>
           <a:prstGeom prst="rect">
             <a:avLst/>
@@ -3288,15 +3934,23 @@
           <a:noFill/>
         </p:spPr>
         <p:txBody>
-          <a:bodyPr wrap="none">
-            <a:spAutoFit/>
+          <a:bodyPr wrap="square">
+            <a:noAutofit/>
           </a:bodyPr>
           <a:lstStyle/>
           <a:p>
             <a:pPr>
-              <a:defRPr sz="3200" b="1"/>
+              <a:lnSpc>
+                <a:spcPts val="2200"/>
+              </a:lnSpc>
             </a:pPr>
             <a:r>
+              <a:rPr sz="2800" b="1">
+                <a:solidFill>
+                  <a:srgbClr val="1A1A2E"/>
+                </a:solidFill>
+                <a:latin typeface="Calibri"/>
+              </a:rPr>
               <a:t>Applications across sectors</a:t>
             </a:r>
           </a:p>
@@ -3310,8 +3964,8 @@
         </p:nvSpPr>
         <p:spPr>
           <a:xfrm>
-            <a:off x="731520" y="1280160"/>
-            <a:ext cx="10515600" cy="5029200"/>
+            <a:off x="548640" y="1234440"/>
+            <a:ext cx="11064240" cy="4937760"/>
           </a:xfrm>
           <a:prstGeom prst="rect">
             <a:avLst/>
@@ -3320,39 +3974,141 @@
         </p:spPr>
         <p:txBody>
           <a:bodyPr wrap="square">
-            <a:spAutoFit/>
+            <a:noAutofit/>
           </a:bodyPr>
           <a:lstStyle/>
           <a:p>
             <a:pPr>
-              <a:defRPr sz="2000"/>
+              <a:lnSpc>
+                <a:spcPts val="2200"/>
+              </a:lnSpc>
+              <a:spcAft>
+                <a:spcPts val="1000"/>
+              </a:spcAft>
             </a:pPr>
             <a:r>
-              <a:t>Retail: purchase histories → segmentation, forecasts</a:t>
+              <a:rPr sz="2000" b="0">
+                <a:solidFill>
+                  <a:srgbClr val="333333"/>
+                </a:solidFill>
+                <a:latin typeface="Calibri"/>
+              </a:rPr>
+              <a:t>• Retail: purchase histories → segmentation, forecasts</a:t>
             </a:r>
           </a:p>
           <a:p>
             <a:pPr>
-              <a:defRPr sz="2000"/>
+              <a:lnSpc>
+                <a:spcPts val="2200"/>
+              </a:lnSpc>
+              <a:spcAft>
+                <a:spcPts val="1000"/>
+              </a:spcAft>
             </a:pPr>
             <a:r>
-              <a:t>Healthcare: EHRs and wearables → risk and monitoring</a:t>
+              <a:rPr sz="2000" b="0">
+                <a:solidFill>
+                  <a:srgbClr val="333333"/>
+                </a:solidFill>
+                <a:latin typeface="Calibri"/>
+              </a:rPr>
+              <a:t>• Healthcare: EHRs and wearables → risk and monitoring</a:t>
             </a:r>
           </a:p>
           <a:p>
             <a:pPr>
-              <a:defRPr sz="2000"/>
+              <a:lnSpc>
+                <a:spcPts val="2200"/>
+              </a:lnSpc>
+              <a:spcAft>
+                <a:spcPts val="1000"/>
+              </a:spcAft>
             </a:pPr>
             <a:r>
-              <a:t>Finance: ledgers → fraud and credit scoring</a:t>
+              <a:rPr sz="2000" b="0">
+                <a:solidFill>
+                  <a:srgbClr val="333333"/>
+                </a:solidFill>
+                <a:latin typeface="Calibri"/>
+              </a:rPr>
+              <a:t>• Finance: ledgers → fraud and credit scoring</a:t>
             </a:r>
           </a:p>
           <a:p>
             <a:pPr>
-              <a:defRPr sz="2000"/>
+              <a:lnSpc>
+                <a:spcPts val="2200"/>
+              </a:lnSpc>
+              <a:spcAft>
+                <a:spcPts val="1000"/>
+              </a:spcAft>
             </a:pPr>
             <a:r>
-              <a:t>Education and government: logs and statistics → intervention and planning</a:t>
+              <a:rPr sz="2000" b="0">
+                <a:solidFill>
+                  <a:srgbClr val="333333"/>
+                </a:solidFill>
+                <a:latin typeface="Calibri"/>
+              </a:rPr>
+              <a:t>• Education and government: logs and statistics →</a:t>
+            </a:r>
+          </a:p>
+          <a:p>
+            <a:pPr>
+              <a:lnSpc>
+                <a:spcPts val="2200"/>
+              </a:lnSpc>
+              <a:spcAft>
+                <a:spcPts val="1000"/>
+              </a:spcAft>
+            </a:pPr>
+            <a:r>
+              <a:rPr sz="2000" b="0">
+                <a:solidFill>
+                  <a:srgbClr val="333333"/>
+                </a:solidFill>
+                <a:latin typeface="Calibri"/>
+              </a:rPr>
+              <a:t>      intervention and planning</a:t>
+            </a:r>
+          </a:p>
+        </p:txBody>
+      </p:sp>
+      <p:sp>
+        <p:nvSpPr>
+          <p:cNvPr id="4" name="TextBox 3"/>
+          <p:cNvSpPr txBox="1"/>
+          <p:nvPr/>
+        </p:nvSpPr>
+        <p:spPr>
+          <a:xfrm>
+            <a:off x="548640" y="6355080"/>
+            <a:ext cx="11064240" cy="320040"/>
+          </a:xfrm>
+          <a:prstGeom prst="rect">
+            <a:avLst/>
+          </a:prstGeom>
+          <a:noFill/>
+        </p:spPr>
+        <p:txBody>
+          <a:bodyPr wrap="square">
+            <a:noAutofit/>
+          </a:bodyPr>
+          <a:lstStyle/>
+          <a:p>
+            <a:pPr algn="r">
+              <a:lnSpc>
+                <a:spcPts val="2200"/>
+              </a:lnSpc>
+              <a:defRPr sz="1000" b="0">
+                <a:solidFill>
+                  <a:srgbClr val="666666"/>
+                </a:solidFill>
+                <a:latin typeface="Calibri"/>
+              </a:defRPr>
+            </a:pPr>
+            <a:r>
+              <a:t>Chapter 1 — Uses Of Datasets</a:t>
             </a:r>
           </a:p>
         </p:txBody>
@@ -3383,8 +4139,8 @@
         </p:nvSpPr>
         <p:spPr>
           <a:xfrm>
-            <a:off x="548640" y="320040"/>
-            <a:ext cx="11064240" cy="914400"/>
+            <a:off x="548640" y="411480"/>
+            <a:ext cx="11064240" cy="777240"/>
           </a:xfrm>
           <a:prstGeom prst="rect">
             <a:avLst/>
@@ -3392,15 +4148,23 @@
           <a:noFill/>
         </p:spPr>
         <p:txBody>
-          <a:bodyPr wrap="none">
-            <a:spAutoFit/>
+          <a:bodyPr wrap="square">
+            <a:noAutofit/>
           </a:bodyPr>
           <a:lstStyle/>
           <a:p>
             <a:pPr>
-              <a:defRPr sz="3200" b="1"/>
+              <a:lnSpc>
+                <a:spcPts val="2200"/>
+              </a:lnSpc>
             </a:pPr>
             <a:r>
+              <a:rPr sz="2800" b="1">
+                <a:solidFill>
+                  <a:srgbClr val="1A1A2E"/>
+                </a:solidFill>
+                <a:latin typeface="Calibri"/>
+              </a:rPr>
               <a:t>Example 1.21 — Purchase history</a:t>
             </a:r>
           </a:p>
@@ -3414,8 +4178,52 @@
         </p:nvSpPr>
         <p:spPr>
           <a:xfrm>
-            <a:off x="731520" y="1280160"/>
-            <a:ext cx="10515600" cy="5029200"/>
+            <a:off x="548640" y="1051560"/>
+            <a:ext cx="11064240" cy="914400"/>
+          </a:xfrm>
+          <a:prstGeom prst="rect">
+            <a:avLst/>
+          </a:prstGeom>
+          <a:solidFill>
+            <a:srgbClr val="F4F4F4"/>
+          </a:solidFill>
+        </p:spPr>
+        <p:txBody>
+          <a:bodyPr wrap="square">
+            <a:noAutofit/>
+          </a:bodyPr>
+          <a:lstStyle/>
+          <a:p>
+            <a:pPr>
+              <a:lnSpc>
+                <a:spcPts val="2200"/>
+              </a:lnSpc>
+              <a:spcAft>
+                <a:spcPts val="200"/>
+              </a:spcAft>
+            </a:pPr>
+            <a:r>
+              <a:rPr sz="2000" b="0">
+                <a:solidFill>
+                  <a:srgbClr val="333333"/>
+                </a:solidFill>
+                <a:latin typeface="Consolas"/>
+              </a:rPr>
+              <a:t>$ cd modules/chapter1/example21/ &amp;&amp; bash run.sh</a:t>
+            </a:r>
+          </a:p>
+        </p:txBody>
+      </p:sp>
+      <p:sp>
+        <p:nvSpPr>
+          <p:cNvPr id="4" name="TextBox 3"/>
+          <p:cNvSpPr txBox="1"/>
+          <p:nvPr/>
+        </p:nvSpPr>
+        <p:spPr>
+          <a:xfrm>
+            <a:off x="548640" y="6355080"/>
+            <a:ext cx="11064240" cy="320040"/>
           </a:xfrm>
           <a:prstGeom prst="rect">
             <a:avLst/>
@@ -3424,39 +4232,23 @@
         </p:spPr>
         <p:txBody>
           <a:bodyPr wrap="square">
-            <a:spAutoFit/>
+            <a:noAutofit/>
           </a:bodyPr>
           <a:lstStyle/>
           <a:p>
-            <a:pPr>
-              <a:defRPr sz="2000"/>
+            <a:pPr algn="r">
+              <a:lnSpc>
+                <a:spcPts val="2200"/>
+              </a:lnSpc>
+              <a:defRPr sz="1000" b="0">
+                <a:solidFill>
+                  <a:srgbClr val="666666"/>
+                </a:solidFill>
+                <a:latin typeface="Calibri"/>
+              </a:defRPr>
             </a:pPr>
             <a:r>
-              <a:t>Setting: one row per order (customer, category, date, amount)</a:t>
-            </a:r>
-          </a:p>
-          <a:p>
-            <a:pPr>
-              <a:defRPr sz="2000"/>
-            </a:pPr>
-            <a:r>
-              <a:t>Key idea: aggregates reveal repurchase rhythms</a:t>
-            </a:r>
-          </a:p>
-          <a:p>
-            <a:pPr>
-              <a:defRPr sz="2000"/>
-            </a:pPr>
-            <a:r>
-              <a:t>Drives segmentation and promotional calendars</a:t>
-            </a:r>
-          </a:p>
-          <a:p>
-            <a:pPr>
-              <a:defRPr sz="2000"/>
-            </a:pPr>
-            <a:r>
-              <a:t>Module: `modules/chapter1/example21/`</a:t>
+              <a:t>Chapter 1 — Uses Of Datasets</a:t>
             </a:r>
           </a:p>
         </p:txBody>
@@ -3487,8 +4279,8 @@
         </p:nvSpPr>
         <p:spPr>
           <a:xfrm>
-            <a:off x="548640" y="320040"/>
-            <a:ext cx="11064240" cy="914400"/>
+            <a:off x="548640" y="411480"/>
+            <a:ext cx="11064240" cy="777240"/>
           </a:xfrm>
           <a:prstGeom prst="rect">
             <a:avLst/>
@@ -3496,15 +4288,23 @@
           <a:noFill/>
         </p:spPr>
         <p:txBody>
-          <a:bodyPr wrap="none">
-            <a:spAutoFit/>
+          <a:bodyPr wrap="square">
+            <a:noAutofit/>
           </a:bodyPr>
           <a:lstStyle/>
           <a:p>
             <a:pPr>
-              <a:defRPr sz="3200" b="1"/>
+              <a:lnSpc>
+                <a:spcPts val="2200"/>
+              </a:lnSpc>
             </a:pPr>
             <a:r>
+              <a:rPr sz="2800" b="1">
+                <a:solidFill>
+                  <a:srgbClr val="1A1A2E"/>
+                </a:solidFill>
+                <a:latin typeface="Calibri"/>
+              </a:rPr>
               <a:t>Case study: customer churn</a:t>
             </a:r>
           </a:p>
@@ -3518,8 +4318,8 @@
         </p:nvSpPr>
         <p:spPr>
           <a:xfrm>
-            <a:off x="731520" y="1280160"/>
-            <a:ext cx="10515600" cy="5029200"/>
+            <a:off x="548640" y="1234440"/>
+            <a:ext cx="11064240" cy="4937760"/>
           </a:xfrm>
           <a:prstGeom prst="rect">
             <a:avLst/>
@@ -3528,39 +4328,141 @@
         </p:spPr>
         <p:txBody>
           <a:bodyPr wrap="square">
-            <a:spAutoFit/>
+            <a:noAutofit/>
           </a:bodyPr>
           <a:lstStyle/>
           <a:p>
             <a:pPr>
-              <a:defRPr sz="2000"/>
+              <a:lnSpc>
+                <a:spcPts val="2200"/>
+              </a:lnSpc>
+              <a:spcAft>
+                <a:spcPts val="1000"/>
+              </a:spcAft>
             </a:pPr>
             <a:r>
-              <a:t>Collect and join customer behavior features</a:t>
+              <a:rPr sz="2000" b="0">
+                <a:solidFill>
+                  <a:srgbClr val="333333"/>
+                </a:solidFill>
+                <a:latin typeface="Calibri"/>
+              </a:rPr>
+              <a:t>• Collect and join customer behavior features</a:t>
             </a:r>
           </a:p>
           <a:p>
             <a:pPr>
-              <a:defRPr sz="2000"/>
+              <a:lnSpc>
+                <a:spcPts val="2200"/>
+              </a:lnSpc>
+              <a:spcAft>
+                <a:spcPts val="1000"/>
+              </a:spcAft>
             </a:pPr>
             <a:r>
-              <a:t>Explore and clean before modeling</a:t>
+              <a:rPr sz="2000" b="0">
+                <a:solidFill>
+                  <a:srgbClr val="333333"/>
+                </a:solidFill>
+                <a:latin typeface="Calibri"/>
+              </a:rPr>
+              <a:t>• Explore and clean before modeling</a:t>
             </a:r>
           </a:p>
           <a:p>
             <a:pPr>
-              <a:defRPr sz="2000"/>
+              <a:lnSpc>
+                <a:spcPts val="2200"/>
+              </a:lnSpc>
+              <a:spcAft>
+                <a:spcPts val="1000"/>
+              </a:spcAft>
             </a:pPr>
             <a:r>
-              <a:t>Train a classifier; score risk of cancellation</a:t>
+              <a:rPr sz="2000" b="0">
+                <a:solidFill>
+                  <a:srgbClr val="333333"/>
+                </a:solidFill>
+                <a:latin typeface="Calibri"/>
+              </a:rPr>
+              <a:t>• Train a classifier; score risk of cancellation</a:t>
             </a:r>
           </a:p>
           <a:p>
             <a:pPr>
-              <a:defRPr sz="2000"/>
+              <a:lnSpc>
+                <a:spcPts val="2200"/>
+              </a:lnSpc>
+              <a:spcAft>
+                <a:spcPts val="1000"/>
+              </a:spcAft>
             </a:pPr>
             <a:r>
-              <a:t>Act with retention offers guided by feature importance</a:t>
+              <a:rPr sz="2000" b="0">
+                <a:solidFill>
+                  <a:srgbClr val="333333"/>
+                </a:solidFill>
+                <a:latin typeface="Calibri"/>
+              </a:rPr>
+              <a:t>• Act with retention offers guided by feature</a:t>
+            </a:r>
+          </a:p>
+          <a:p>
+            <a:pPr>
+              <a:lnSpc>
+                <a:spcPts val="2200"/>
+              </a:lnSpc>
+              <a:spcAft>
+                <a:spcPts val="1000"/>
+              </a:spcAft>
+            </a:pPr>
+            <a:r>
+              <a:rPr sz="2000" b="0">
+                <a:solidFill>
+                  <a:srgbClr val="333333"/>
+                </a:solidFill>
+                <a:latin typeface="Calibri"/>
+              </a:rPr>
+              <a:t>      importance</a:t>
+            </a:r>
+          </a:p>
+        </p:txBody>
+      </p:sp>
+      <p:sp>
+        <p:nvSpPr>
+          <p:cNvPr id="4" name="TextBox 3"/>
+          <p:cNvSpPr txBox="1"/>
+          <p:nvPr/>
+        </p:nvSpPr>
+        <p:spPr>
+          <a:xfrm>
+            <a:off x="548640" y="6355080"/>
+            <a:ext cx="11064240" cy="320040"/>
+          </a:xfrm>
+          <a:prstGeom prst="rect">
+            <a:avLst/>
+          </a:prstGeom>
+          <a:noFill/>
+        </p:spPr>
+        <p:txBody>
+          <a:bodyPr wrap="square">
+            <a:noAutofit/>
+          </a:bodyPr>
+          <a:lstStyle/>
+          <a:p>
+            <a:pPr algn="r">
+              <a:lnSpc>
+                <a:spcPts val="2200"/>
+              </a:lnSpc>
+              <a:defRPr sz="1000" b="0">
+                <a:solidFill>
+                  <a:srgbClr val="666666"/>
+                </a:solidFill>
+                <a:latin typeface="Calibri"/>
+              </a:defRPr>
+            </a:pPr>
+            <a:r>
+              <a:t>Chapter 1 — Uses Of Datasets</a:t>
             </a:r>
           </a:p>
         </p:txBody>
@@ -3591,8 +4493,8 @@
         </p:nvSpPr>
         <p:spPr>
           <a:xfrm>
-            <a:off x="548640" y="320040"/>
-            <a:ext cx="11064240" cy="914400"/>
+            <a:off x="548640" y="411480"/>
+            <a:ext cx="11064240" cy="777240"/>
           </a:xfrm>
           <a:prstGeom prst="rect">
             <a:avLst/>
@@ -3600,15 +4502,23 @@
           <a:noFill/>
         </p:spPr>
         <p:txBody>
-          <a:bodyPr wrap="none">
-            <a:spAutoFit/>
+          <a:bodyPr wrap="square">
+            <a:noAutofit/>
           </a:bodyPr>
           <a:lstStyle/>
           <a:p>
             <a:pPr>
-              <a:defRPr sz="3200" b="1"/>
+              <a:lnSpc>
+                <a:spcPts val="2200"/>
+              </a:lnSpc>
             </a:pPr>
             <a:r>
+              <a:rPr sz="2800" b="1">
+                <a:solidFill>
+                  <a:srgbClr val="1A1A2E"/>
+                </a:solidFill>
+                <a:latin typeface="Calibri"/>
+              </a:rPr>
               <a:t>Example 1.31 — Churn model sketch</a:t>
             </a:r>
           </a:p>
@@ -3622,8 +4532,52 @@
         </p:nvSpPr>
         <p:spPr>
           <a:xfrm>
-            <a:off x="731520" y="1280160"/>
-            <a:ext cx="10515600" cy="5029200"/>
+            <a:off x="548640" y="1051560"/>
+            <a:ext cx="11064240" cy="914400"/>
+          </a:xfrm>
+          <a:prstGeom prst="rect">
+            <a:avLst/>
+          </a:prstGeom>
+          <a:solidFill>
+            <a:srgbClr val="F4F4F4"/>
+          </a:solidFill>
+        </p:spPr>
+        <p:txBody>
+          <a:bodyPr wrap="square">
+            <a:noAutofit/>
+          </a:bodyPr>
+          <a:lstStyle/>
+          <a:p>
+            <a:pPr>
+              <a:lnSpc>
+                <a:spcPts val="2200"/>
+              </a:lnSpc>
+              <a:spcAft>
+                <a:spcPts val="200"/>
+              </a:spcAft>
+            </a:pPr>
+            <a:r>
+              <a:rPr sz="2000" b="0">
+                <a:solidFill>
+                  <a:srgbClr val="333333"/>
+                </a:solidFill>
+                <a:latin typeface="Consolas"/>
+              </a:rPr>
+              <a:t>$ cd modules/chapter1/example31/ &amp;&amp; bash run.sh</a:t>
+            </a:r>
+          </a:p>
+        </p:txBody>
+      </p:sp>
+      <p:sp>
+        <p:nvSpPr>
+          <p:cNvPr id="4" name="TextBox 3"/>
+          <p:cNvSpPr txBox="1"/>
+          <p:nvPr/>
+        </p:nvSpPr>
+        <p:spPr>
+          <a:xfrm>
+            <a:off x="548640" y="6355080"/>
+            <a:ext cx="11064240" cy="320040"/>
           </a:xfrm>
           <a:prstGeom prst="rect">
             <a:avLst/>
@@ -3632,39 +4586,23 @@
         </p:spPr>
         <p:txBody>
           <a:bodyPr wrap="square">
-            <a:spAutoFit/>
+            <a:noAutofit/>
           </a:bodyPr>
           <a:lstStyle/>
           <a:p>
-            <a:pPr>
-              <a:defRPr sz="2000"/>
+            <a:pPr algn="r">
+              <a:lnSpc>
+                <a:spcPts val="2200"/>
+              </a:lnSpc>
+              <a:defRPr sz="1000" b="0">
+                <a:solidFill>
+                  <a:srgbClr val="666666"/>
+                </a:solidFill>
+                <a:latin typeface="Calibri"/>
+              </a:defRPr>
             </a:pPr>
             <a:r>
-              <a:t>Setting: Python workflow on churn labels</a:t>
-            </a:r>
-          </a:p>
-          <a:p>
-            <a:pPr>
-              <a:defRPr sz="2000"/>
-            </a:pPr>
-            <a:r>
-              <a:t>Key idea: same arc as fraud or demand forecasting</a:t>
-            </a:r>
-          </a:p>
-          <a:p>
-            <a:pPr>
-              <a:defRPr sz="2000"/>
-            </a:pPr>
-            <a:r>
-              <a:t>Only labels and cost of errors change by domain</a:t>
-            </a:r>
-          </a:p>
-          <a:p>
-            <a:pPr>
-              <a:defRPr sz="2000"/>
-            </a:pPr>
-            <a:r>
-              <a:t>Try it: `modules/chapter1/example31/`</a:t>
+              <a:t>Chapter 1 — Uses Of Datasets</a:t>
             </a:r>
           </a:p>
         </p:txBody>
@@ -3695,8 +4633,8 @@
         </p:nvSpPr>
         <p:spPr>
           <a:xfrm>
-            <a:off x="548640" y="320040"/>
-            <a:ext cx="11064240" cy="914400"/>
+            <a:off x="548640" y="411480"/>
+            <a:ext cx="11064240" cy="777240"/>
           </a:xfrm>
           <a:prstGeom prst="rect">
             <a:avLst/>
@@ -3704,15 +4642,23 @@
           <a:noFill/>
         </p:spPr>
         <p:txBody>
-          <a:bodyPr wrap="none">
-            <a:spAutoFit/>
+          <a:bodyPr wrap="square">
+            <a:noAutofit/>
           </a:bodyPr>
           <a:lstStyle/>
           <a:p>
             <a:pPr>
-              <a:defRPr sz="3200" b="1"/>
+              <a:lnSpc>
+                <a:spcPts val="2200"/>
+              </a:lnSpc>
             </a:pPr>
             <a:r>
+              <a:rPr sz="2800" b="1">
+                <a:solidFill>
+                  <a:srgbClr val="1A1A2E"/>
+                </a:solidFill>
+                <a:latin typeface="Calibri"/>
+              </a:rPr>
               <a:t>Takeaways</a:t>
             </a:r>
           </a:p>
@@ -3726,8 +4672,8 @@
         </p:nvSpPr>
         <p:spPr>
           <a:xfrm>
-            <a:off x="731520" y="1280160"/>
-            <a:ext cx="10515600" cy="5029200"/>
+            <a:off x="548640" y="1234440"/>
+            <a:ext cx="11064240" cy="4937760"/>
           </a:xfrm>
           <a:prstGeom prst="rect">
             <a:avLst/>
@@ -3736,63 +4682,97 @@
         </p:spPr>
         <p:txBody>
           <a:bodyPr wrap="square">
-            <a:spAutoFit/>
+            <a:noAutofit/>
           </a:bodyPr>
           <a:lstStyle/>
           <a:p>
             <a:pPr>
-              <a:defRPr sz="2000"/>
+              <a:lnSpc>
+                <a:spcPts val="2200"/>
+              </a:lnSpc>
+              <a:spcAft>
+                <a:spcPts val="1000"/>
+              </a:spcAft>
             </a:pPr>
             <a:r>
-              <a:t>Domain vocabulary changes; the lifecycle does not</a:t>
+              <a:rPr sz="2000" b="0">
+                <a:solidFill>
+                  <a:srgbClr val="333333"/>
+                </a:solidFill>
+                <a:latin typeface="Calibri"/>
+              </a:rPr>
+              <a:t>• Domain vocabulary changes; the lifecycle does not</a:t>
             </a:r>
           </a:p>
           <a:p>
             <a:pPr>
-              <a:defRPr sz="2000"/>
+              <a:lnSpc>
+                <a:spcPts val="2200"/>
+              </a:lnSpc>
+              <a:spcAft>
+                <a:spcPts val="1000"/>
+              </a:spcAft>
             </a:pPr>
             <a:r>
-              <a:t>Exploration and quality feed every serious application</a:t>
+              <a:rPr sz="2000" b="0">
+                <a:solidFill>
+                  <a:srgbClr val="333333"/>
+                </a:solidFill>
+                <a:latin typeface="Calibri"/>
+              </a:rPr>
+              <a:t>• Exploration and quality feed every serious</a:t>
             </a:r>
           </a:p>
           <a:p>
             <a:pPr>
-              <a:defRPr sz="2000"/>
+              <a:lnSpc>
+                <a:spcPts val="2200"/>
+              </a:lnSpc>
+              <a:spcAft>
+                <a:spcPts val="1000"/>
+              </a:spcAft>
             </a:pPr>
             <a:r>
-              <a:t>Churn shows define → prepare → model → intervene</a:t>
-            </a:r>
-          </a:p>
-        </p:txBody>
-      </p:sp>
-    </p:spTree>
-  </p:cSld>
-  <p:clrMapOvr>
-    <a:masterClrMapping/>
-  </p:clrMapOvr>
-</p:sld>
-</file>
-
-<file path=ppt/slides/slide8.xml><?xml version="1.0" encoding="utf-8"?>
-<p:sld xmlns:a="http://schemas.openxmlformats.org/drawingml/2006/main" xmlns:p="http://schemas.openxmlformats.org/presentationml/2006/main" xmlns:r="http://schemas.openxmlformats.org/officeDocument/2006/relationships">
-  <p:cSld>
-    <p:spTree>
-      <p:nvGrpSpPr>
-        <p:cNvPr id="1" name=""/>
-        <p:cNvGrpSpPr/>
-        <p:nvPr/>
-      </p:nvGrpSpPr>
-      <p:grpSpPr/>
-      <p:sp>
-        <p:nvSpPr>
-          <p:cNvPr id="2" name="TextBox 1"/>
+              <a:rPr sz="2000" b="0">
+                <a:solidFill>
+                  <a:srgbClr val="333333"/>
+                </a:solidFill>
+                <a:latin typeface="Calibri"/>
+              </a:rPr>
+              <a:t>      application</a:t>
+            </a:r>
+          </a:p>
+          <a:p>
+            <a:pPr>
+              <a:lnSpc>
+                <a:spcPts val="2200"/>
+              </a:lnSpc>
+              <a:spcAft>
+                <a:spcPts val="1000"/>
+              </a:spcAft>
+            </a:pPr>
+            <a:r>
+              <a:rPr sz="2000" b="0">
+                <a:solidFill>
+                  <a:srgbClr val="333333"/>
+                </a:solidFill>
+                <a:latin typeface="Calibri"/>
+              </a:rPr>
+              <a:t>• Churn shows define → prepare → model → intervene</a:t>
+            </a:r>
+          </a:p>
+        </p:txBody>
+      </p:sp>
+      <p:sp>
+        <p:nvSpPr>
+          <p:cNvPr id="4" name="TextBox 3"/>
           <p:cNvSpPr txBox="1"/>
           <p:nvPr/>
         </p:nvSpPr>
         <p:spPr>
           <a:xfrm>
-            <a:off x="548640" y="320040"/>
-            <a:ext cx="11064240" cy="914400"/>
+            <a:off x="548640" y="6355080"/>
+            <a:ext cx="11064240" cy="320040"/>
           </a:xfrm>
           <a:prstGeom prst="rect">
             <a:avLst/>
@@ -3800,55 +4780,24 @@
           <a:noFill/>
         </p:spPr>
         <p:txBody>
-          <a:bodyPr wrap="none">
-            <a:spAutoFit/>
+          <a:bodyPr wrap="square">
+            <a:noAutofit/>
           </a:bodyPr>
           <a:lstStyle/>
           <a:p>
-            <a:pPr>
-              <a:defRPr sz="3200" b="1"/>
+            <a:pPr algn="r">
+              <a:lnSpc>
+                <a:spcPts val="2200"/>
+              </a:lnSpc>
+              <a:defRPr sz="1000" b="0">
+                <a:solidFill>
+                  <a:srgbClr val="666666"/>
+                </a:solidFill>
+                <a:latin typeface="Calibri"/>
+              </a:defRPr>
             </a:pPr>
             <a:r>
-              <a:t>Next</a:t>
-            </a:r>
-          </a:p>
-        </p:txBody>
-      </p:sp>
-      <p:sp>
-        <p:nvSpPr>
-          <p:cNvPr id="3" name="TextBox 2"/>
-          <p:cNvSpPr txBox="1"/>
-          <p:nvPr/>
-        </p:nvSpPr>
-        <p:spPr>
-          <a:xfrm>
-            <a:off x="731520" y="1280160"/>
-            <a:ext cx="10515600" cy="5029200"/>
-          </a:xfrm>
-          <a:prstGeom prst="rect">
-            <a:avLst/>
-          </a:prstGeom>
-          <a:noFill/>
-        </p:spPr>
-        <p:txBody>
-          <a:bodyPr wrap="square">
-            <a:spAutoFit/>
-          </a:bodyPr>
-          <a:lstStyle/>
-          <a:p>
-            <a:pPr>
-              <a:defRPr sz="2000"/>
-            </a:pPr>
-            <a:r>
-              <a:t>Complete the quiz for this clip</a:t>
-            </a:r>
-          </a:p>
-          <a:p>
-            <a:pPr>
-              <a:defRPr sz="2000"/>
-            </a:pPr>
-            <a:r>
-              <a:t>Then continue to: Dataset management</a:t>
+              <a:t>Chapter 1 — Uses Of Datasets</a:t>
             </a:r>
           </a:p>
         </p:txBody>
@@ -4179,4 +5128,324 @@
   </a:objectDefaults>
   <a:extraClrSchemeLst/>
 </a:theme>
+</file>
+
+<file path=ppt/theme/theme2.xml><?xml version="1.0" encoding="utf-8"?>
+<a:theme xmlns:a="http://schemas.openxmlformats.org/drawingml/2006/main" name="Office Theme">
+  <a:themeElements>
+    <a:clrScheme name="Office">
+      <a:dk1>
+        <a:sysClr val="windowText" lastClr="000000"/>
+      </a:dk1>
+      <a:lt1>
+        <a:sysClr val="window" lastClr="FFFFFF"/>
+      </a:lt1>
+      <a:dk2>
+        <a:srgbClr val="1F497D"/>
+      </a:dk2>
+      <a:lt2>
+        <a:srgbClr val="EEECE1"/>
+      </a:lt2>
+      <a:accent1>
+        <a:srgbClr val="4F81BD"/>
+      </a:accent1>
+      <a:accent2>
+        <a:srgbClr val="C0504D"/>
+      </a:accent2>
+      <a:accent3>
+        <a:srgbClr val="9BBB59"/>
+      </a:accent3>
+      <a:accent4>
+        <a:srgbClr val="8064A2"/>
+      </a:accent4>
+      <a:accent5>
+        <a:srgbClr val="4BACC6"/>
+      </a:accent5>
+      <a:accent6>
+        <a:srgbClr val="F79646"/>
+      </a:accent6>
+      <a:hlink>
+        <a:srgbClr val="0000FF"/>
+      </a:hlink>
+      <a:folHlink>
+        <a:srgbClr val="800080"/>
+      </a:folHlink>
+    </a:clrScheme>
+    <a:fontScheme name="Office">
+      <a:majorFont>
+        <a:latin typeface="Calibri"/>
+        <a:ea typeface=""/>
+        <a:cs typeface=""/>
+        <a:font script="Jpan" typeface="ＭＳ Ｐゴシック"/>
+        <a:font script="Hang" typeface="맑은 고딕"/>
+        <a:font script="Hans" typeface="宋体"/>
+        <a:font script="Hant" typeface="新細明體"/>
+        <a:font script="Arab" typeface="Times New Roman"/>
+        <a:font script="Hebr" typeface="Times New Roman"/>
+        <a:font script="Thai" typeface="Angsana New"/>
+        <a:font script="Ethi" typeface="Nyala"/>
+        <a:font script="Beng" typeface="Vrinda"/>
+        <a:font script="Gujr" typeface="Shruti"/>
+        <a:font script="Khmr" typeface="MoolBoran"/>
+        <a:font script="Knda" typeface="Tunga"/>
+        <a:font script="Guru" typeface="Raavi"/>
+        <a:font script="Cans" typeface="Euphemia"/>
+        <a:font script="Cher" typeface="Plantagenet Cherokee"/>
+        <a:font script="Yiii" typeface="Microsoft Yi Baiti"/>
+        <a:font script="Tibt" typeface="Microsoft Himalaya"/>
+        <a:font script="Thaa" typeface="MV Boli"/>
+        <a:font script="Deva" typeface="Mangal"/>
+        <a:font script="Telu" typeface="Gautami"/>
+        <a:font script="Taml" typeface="Latha"/>
+        <a:font script="Syrc" typeface="Estrangelo Edessa"/>
+        <a:font script="Orya" typeface="Kalinga"/>
+        <a:font script="Mlym" typeface="Kartika"/>
+        <a:font script="Laoo" typeface="DokChampa"/>
+        <a:font script="Sinh" typeface="Iskoola Pota"/>
+        <a:font script="Mong" typeface="Mongolian Baiti"/>
+        <a:font script="Viet" typeface="Times New Roman"/>
+        <a:font script="Uigh" typeface="Microsoft Uighur"/>
+        <a:font script="Geor" typeface="Sylfaen"/>
+      </a:majorFont>
+      <a:minorFont>
+        <a:latin typeface="Calibri"/>
+        <a:ea typeface=""/>
+        <a:cs typeface=""/>
+        <a:font script="Jpan" typeface="ＭＳ Ｐゴシック"/>
+        <a:font script="Hang" typeface="맑은 고딕"/>
+        <a:font script="Hans" typeface="宋体"/>
+        <a:font script="Hant" typeface="新細明體"/>
+        <a:font script="Arab" typeface="Arial"/>
+        <a:font script="Hebr" typeface="Arial"/>
+        <a:font script="Thai" typeface="Cordia New"/>
+        <a:font script="Ethi" typeface="Nyala"/>
+        <a:font script="Beng" typeface="Vrinda"/>
+        <a:font script="Gujr" typeface="Shruti"/>
+        <a:font script="Khmr" typeface="DaunPenh"/>
+        <a:font script="Knda" typeface="Tunga"/>
+        <a:font script="Guru" typeface="Raavi"/>
+        <a:font script="Cans" typeface="Euphemia"/>
+        <a:font script="Cher" typeface="Plantagenet Cherokee"/>
+        <a:font script="Yiii" typeface="Microsoft Yi Baiti"/>
+        <a:font script="Tibt" typeface="Microsoft Himalaya"/>
+        <a:font script="Thaa" typeface="MV Boli"/>
+        <a:font script="Deva" typeface="Mangal"/>
+        <a:font script="Telu" typeface="Gautami"/>
+        <a:font script="Taml" typeface="Latha"/>
+        <a:font script="Syrc" typeface="Estrangelo Edessa"/>
+        <a:font script="Orya" typeface="Kalinga"/>
+        <a:font script="Mlym" typeface="Kartika"/>
+        <a:font script="Laoo" typeface="DokChampa"/>
+        <a:font script="Sinh" typeface="Iskoola Pota"/>
+        <a:font script="Mong" typeface="Mongolian Baiti"/>
+        <a:font script="Viet" typeface="Arial"/>
+        <a:font script="Uigh" typeface="Microsoft Uighur"/>
+        <a:font script="Geor" typeface="Sylfaen"/>
+      </a:minorFont>
+    </a:fontScheme>
+    <a:fmtScheme name="Office">
+      <a:fillStyleLst>
+        <a:solidFill>
+          <a:schemeClr val="phClr"/>
+        </a:solidFill>
+        <a:gradFill rotWithShape="1">
+          <a:gsLst>
+            <a:gs pos="0">
+              <a:schemeClr val="phClr">
+                <a:tint val="50000"/>
+                <a:satMod val="300000"/>
+              </a:schemeClr>
+            </a:gs>
+            <a:gs pos="35000">
+              <a:schemeClr val="phClr">
+                <a:tint val="37000"/>
+                <a:satMod val="300000"/>
+              </a:schemeClr>
+            </a:gs>
+            <a:gs pos="100000">
+              <a:schemeClr val="phClr">
+                <a:tint val="15000"/>
+                <a:satMod val="350000"/>
+              </a:schemeClr>
+            </a:gs>
+          </a:gsLst>
+          <a:lin ang="16200000" scaled="1"/>
+        </a:gradFill>
+        <a:gradFill rotWithShape="1">
+          <a:gsLst>
+            <a:gs pos="0">
+              <a:schemeClr val="phClr">
+                <a:tint val="100000"/>
+                <a:shade val="100000"/>
+                <a:satMod val="130000"/>
+              </a:schemeClr>
+            </a:gs>
+            <a:gs pos="100000">
+              <a:schemeClr val="phClr">
+                <a:tint val="50000"/>
+                <a:shade val="100000"/>
+                <a:satMod val="350000"/>
+              </a:schemeClr>
+            </a:gs>
+          </a:gsLst>
+          <a:lin ang="16200000" scaled="0"/>
+        </a:gradFill>
+      </a:fillStyleLst>
+      <a:lnStyleLst>
+        <a:ln w="9525" cap="flat" cmpd="sng" algn="ctr">
+          <a:solidFill>
+            <a:schemeClr val="phClr">
+              <a:shade val="95000"/>
+              <a:satMod val="105000"/>
+            </a:schemeClr>
+          </a:solidFill>
+          <a:prstDash val="solid"/>
+        </a:ln>
+        <a:ln w="25400" cap="flat" cmpd="sng" algn="ctr">
+          <a:solidFill>
+            <a:schemeClr val="phClr"/>
+          </a:solidFill>
+          <a:prstDash val="solid"/>
+        </a:ln>
+        <a:ln w="38100" cap="flat" cmpd="sng" algn="ctr">
+          <a:solidFill>
+            <a:schemeClr val="phClr"/>
+          </a:solidFill>
+          <a:prstDash val="solid"/>
+        </a:ln>
+      </a:lnStyleLst>
+      <a:effectStyleLst>
+        <a:effectStyle>
+          <a:effectLst>
+            <a:outerShdw blurRad="40000" dist="20000" dir="5400000" rotWithShape="0">
+              <a:srgbClr val="000000">
+                <a:alpha val="38000"/>
+              </a:srgbClr>
+            </a:outerShdw>
+          </a:effectLst>
+        </a:effectStyle>
+        <a:effectStyle>
+          <a:effectLst>
+            <a:outerShdw blurRad="40000" dist="23000" dir="5400000" rotWithShape="0">
+              <a:srgbClr val="000000">
+                <a:alpha val="35000"/>
+              </a:srgbClr>
+            </a:outerShdw>
+          </a:effectLst>
+        </a:effectStyle>
+        <a:effectStyle>
+          <a:effectLst>
+            <a:outerShdw blurRad="40000" dist="23000" dir="5400000" rotWithShape="0">
+              <a:srgbClr val="000000">
+                <a:alpha val="35000"/>
+              </a:srgbClr>
+            </a:outerShdw>
+          </a:effectLst>
+          <a:scene3d>
+            <a:camera prst="orthographicFront">
+              <a:rot lat="0" lon="0" rev="0"/>
+            </a:camera>
+            <a:lightRig rig="threePt" dir="t">
+              <a:rot lat="0" lon="0" rev="1200000"/>
+            </a:lightRig>
+          </a:scene3d>
+          <a:sp3d>
+            <a:bevelT w="63500" h="25400"/>
+          </a:sp3d>
+        </a:effectStyle>
+      </a:effectStyleLst>
+      <a:bgFillStyleLst>
+        <a:solidFill>
+          <a:schemeClr val="phClr"/>
+        </a:solidFill>
+        <a:gradFill rotWithShape="1">
+          <a:gsLst>
+            <a:gs pos="0">
+              <a:schemeClr val="phClr">
+                <a:tint val="40000"/>
+                <a:satMod val="350000"/>
+              </a:schemeClr>
+            </a:gs>
+            <a:gs pos="40000">
+              <a:schemeClr val="phClr">
+                <a:tint val="45000"/>
+                <a:shade val="99000"/>
+                <a:satMod val="350000"/>
+              </a:schemeClr>
+            </a:gs>
+            <a:gs pos="100000">
+              <a:schemeClr val="phClr">
+                <a:shade val="20000"/>
+                <a:satMod val="255000"/>
+              </a:schemeClr>
+            </a:gs>
+          </a:gsLst>
+          <a:path path="circle">
+            <a:fillToRect l="50000" t="-80000" r="50000" b="180000"/>
+          </a:path>
+        </a:gradFill>
+        <a:gradFill rotWithShape="1">
+          <a:gsLst>
+            <a:gs pos="0">
+              <a:schemeClr val="phClr">
+                <a:tint val="80000"/>
+                <a:satMod val="300000"/>
+              </a:schemeClr>
+            </a:gs>
+            <a:gs pos="100000">
+              <a:schemeClr val="phClr">
+                <a:shade val="30000"/>
+                <a:satMod val="200000"/>
+              </a:schemeClr>
+            </a:gs>
+          </a:gsLst>
+          <a:path path="circle">
+            <a:fillToRect l="50000" t="50000" r="50000" b="50000"/>
+          </a:path>
+        </a:gradFill>
+      </a:bgFillStyleLst>
+    </a:fmtScheme>
+  </a:themeElements>
+  <a:objectDefaults>
+    <a:spDef>
+      <a:spPr/>
+      <a:bodyPr/>
+      <a:lstStyle/>
+      <a:style>
+        <a:lnRef idx="1">
+          <a:schemeClr val="accent1"/>
+        </a:lnRef>
+        <a:fillRef idx="3">
+          <a:schemeClr val="accent1"/>
+        </a:fillRef>
+        <a:effectRef idx="2">
+          <a:schemeClr val="accent1"/>
+        </a:effectRef>
+        <a:fontRef idx="minor">
+          <a:schemeClr val="lt1"/>
+        </a:fontRef>
+      </a:style>
+    </a:spDef>
+    <a:lnDef>
+      <a:spPr/>
+      <a:bodyPr/>
+      <a:lstStyle/>
+      <a:style>
+        <a:lnRef idx="2">
+          <a:schemeClr val="accent1"/>
+        </a:lnRef>
+        <a:fillRef idx="0">
+          <a:schemeClr val="accent1"/>
+        </a:fillRef>
+        <a:effectRef idx="1">
+          <a:schemeClr val="accent1"/>
+        </a:effectRef>
+        <a:fontRef idx="minor">
+          <a:schemeClr val="tx1"/>
+        </a:fontRef>
+      </a:style>
+    </a:lnDef>
+  </a:objectDefaults>
+  <a:extraClrSchemeLst/>
+</a:theme>
 </file>
--- a/chapter1/clips/clip-06-uses-of-datasets/clip.pptx
+++ b/chapter1/clips/clip-06-uses-of-datasets/clip.pptx
@@ -6,12 +6,14 @@
   </p:sldMasterIdLst>
   <p:sldIdLst>
     <p:sldId id="256" r:id="rId7"/>
-    <p:sldId id="257" r:id="rId8"/>
-    <p:sldId id="258" r:id="rId9"/>
-    <p:sldId id="259" r:id="rId10"/>
+    <p:sldId id="257" r:id="rId9"/>
+    <p:sldId id="258" r:id="rId10"/>
+    <p:sldId id="259" r:id="rId11"/>
     <p:sldId id="260" r:id="rId12"/>
     <p:sldId id="261" r:id="rId13"/>
     <p:sldId id="262" r:id="rId14"/>
+    <p:sldId id="263" r:id="rId15"/>
+    <p:sldId id="264" r:id="rId16"/>
   </p:sldIdLst>
   <p:sldSz cx="12191695" cy="6858000" type="screen4x3"/>
   <p:notesSz cx="6858000" cy="9144000"/>
@@ -508,17 +510,7 @@
           <a:lstStyle/>
           <a:p>
             <a:r>
-              <a:t>Setting: one row per order (customer, category, date, amount)</a:t>
-            </a:r>
-          </a:p>
-          <a:p>
-            <a:r>
-              <a:t>Key idea: aggregates reveal repurchase rhythms</a:t>
-            </a:r>
-          </a:p>
-          <a:p>
-            <a:r>
-              <a:t>Drives segmentation and promotional calendars</a:t>
+              <a:t>Earlier clips answered what a dataset is and how to read one responsibly. This clip asks where datasets create value in practice, then walks a complete churn workflow.</a:t>
             </a:r>
           </a:p>
         </p:txBody>
@@ -588,17 +580,427 @@
           <a:lstStyle/>
           <a:p>
             <a:r>
-              <a:t>Setting: Python workflow on churn labels</a:t>
-            </a:r>
-          </a:p>
-          <a:p>
-            <a:r>
-              <a:t>Key idea: same arc as fraud or demand forecasting</a:t>
-            </a:r>
-          </a:p>
-          <a:p>
-            <a:r>
-              <a:t>Only labels and cost of errors change by domain</a:t>
+              <a:t>You should map sectors to typical datasets and goals, recognize the shared lifecycle across domains, and outline the steps in the customer-churn case study.</a:t>
+            </a:r>
+          </a:p>
+        </p:txBody>
+      </p:sp>
+      <p:sp>
+        <p:nvSpPr>
+          <p:cNvPr id="4" name="Slide Number Placeholder 3"/>
+          <p:cNvSpPr>
+            <a:spLocks noGrp="1"/>
+          </p:cNvSpPr>
+          <p:nvPr>
+            <p:ph type="sldNum" idx="5" sz="quarter"/>
+          </p:nvPr>
+        </p:nvSpPr>
+        <p:spPr/>
+      </p:sp>
+    </p:spTree>
+  </p:cSld>
+  <p:clrMapOvr>
+    <a:masterClrMapping/>
+  </p:clrMapOvr>
+</p:notes>
+</file>
+
+<file path=ppt/notesSlides/notesSlide3.xml><?xml version="1.0" encoding="utf-8"?>
+<p:notes xmlns:a="http://schemas.openxmlformats.org/drawingml/2006/main" xmlns:p="http://schemas.openxmlformats.org/presentationml/2006/main" xmlns:r="http://schemas.openxmlformats.org/officeDocument/2006/relationships">
+  <p:cSld>
+    <p:spTree>
+      <p:nvGrpSpPr>
+        <p:cNvPr id="1" name=""/>
+        <p:cNvGrpSpPr/>
+        <p:nvPr/>
+      </p:nvGrpSpPr>
+      <p:grpSpPr>
+        <a:xfrm>
+          <a:off x="0" y="0"/>
+          <a:ext cx="0" cy="0"/>
+          <a:chOff x="0" y="0"/>
+          <a:chExt cx="0" cy="0"/>
+        </a:xfrm>
+      </p:grpSpPr>
+      <p:sp>
+        <p:nvSpPr>
+          <p:cNvPr id="2" name="Slide Image Placeholder 1"/>
+          <p:cNvSpPr>
+            <a:spLocks noGrp="1"/>
+          </p:cNvSpPr>
+          <p:nvPr>
+            <p:ph type="sldImg" idx="2"/>
+          </p:nvPr>
+        </p:nvSpPr>
+        <p:spPr/>
+      </p:sp>
+      <p:sp>
+        <p:nvSpPr>
+          <p:cNvPr id="3" name="Notes Placeholder 2"/>
+          <p:cNvSpPr>
+            <a:spLocks noGrp="1"/>
+          </p:cNvSpPr>
+          <p:nvPr>
+            <p:ph type="body" idx="3" sz="quarter"/>
+          </p:nvPr>
+        </p:nvSpPr>
+        <p:spPr/>
+        <p:txBody>
+          <a:bodyPr/>
+          <a:lstStyle/>
+          <a:p>
+            <a:r>
+              <a:t>Organizations collect records about customers, patients, students, or transactions, organize them, and use them to monitor performance, detect risk, or personalize services. Retail emphasizes purchase and clickstream data; healthcare joins EHRs with wearables; finance scores transactions; education and government use logs and public statistics for intervention and planning.</a:t>
+            </a:r>
+          </a:p>
+        </p:txBody>
+      </p:sp>
+      <p:sp>
+        <p:nvSpPr>
+          <p:cNvPr id="4" name="Slide Number Placeholder 3"/>
+          <p:cNvSpPr>
+            <a:spLocks noGrp="1"/>
+          </p:cNvSpPr>
+          <p:nvPr>
+            <p:ph type="sldNum" idx="5" sz="quarter"/>
+          </p:nvPr>
+        </p:nvSpPr>
+        <p:spPr/>
+      </p:sp>
+    </p:spTree>
+  </p:cSld>
+  <p:clrMapOvr>
+    <a:masterClrMapping/>
+  </p:clrMapOvr>
+</p:notes>
+</file>
+
+<file path=ppt/notesSlides/notesSlide4.xml><?xml version="1.0" encoding="utf-8"?>
+<p:notes xmlns:a="http://schemas.openxmlformats.org/drawingml/2006/main" xmlns:p="http://schemas.openxmlformats.org/presentationml/2006/main" xmlns:r="http://schemas.openxmlformats.org/officeDocument/2006/relationships">
+  <p:cSld>
+    <p:spTree>
+      <p:nvGrpSpPr>
+        <p:cNvPr id="1" name=""/>
+        <p:cNvGrpSpPr/>
+        <p:nvPr/>
+      </p:nvGrpSpPr>
+      <p:grpSpPr>
+        <a:xfrm>
+          <a:off x="0" y="0"/>
+          <a:ext cx="0" cy="0"/>
+          <a:chOff x="0" y="0"/>
+          <a:chExt cx="0" cy="0"/>
+        </a:xfrm>
+      </p:grpSpPr>
+      <p:sp>
+        <p:nvSpPr>
+          <p:cNvPr id="2" name="Slide Image Placeholder 1"/>
+          <p:cNvSpPr>
+            <a:spLocks noGrp="1"/>
+          </p:cNvSpPr>
+          <p:nvPr>
+            <p:ph type="sldImg" idx="2"/>
+          </p:nvPr>
+        </p:nvSpPr>
+        <p:spPr/>
+      </p:sp>
+      <p:sp>
+        <p:nvSpPr>
+          <p:cNvPr id="3" name="Notes Placeholder 2"/>
+          <p:cNvSpPr>
+            <a:spLocks noGrp="1"/>
+          </p:cNvSpPr>
+          <p:nvPr>
+            <p:ph type="body" idx="3" sz="quarter"/>
+          </p:nvPr>
+        </p:nvSpPr>
+        <p:spPr/>
+        <p:txBody>
+          <a:bodyPr/>
+          <a:lstStyle/>
+          <a:p>
+            <a:r>
+              <a:t>Example 1.21 stores one row per order with customer, category, date, and amount. Aggregating by customer reveals repurchase intervals and category preferences that drive segmentation and promotions. The example 21 module walks through the concept.</a:t>
+            </a:r>
+          </a:p>
+        </p:txBody>
+      </p:sp>
+      <p:sp>
+        <p:nvSpPr>
+          <p:cNvPr id="4" name="Slide Number Placeholder 3"/>
+          <p:cNvSpPr>
+            <a:spLocks noGrp="1"/>
+          </p:cNvSpPr>
+          <p:nvPr>
+            <p:ph type="sldNum" idx="5" sz="quarter"/>
+          </p:nvPr>
+        </p:nvSpPr>
+        <p:spPr/>
+      </p:sp>
+    </p:spTree>
+  </p:cSld>
+  <p:clrMapOvr>
+    <a:masterClrMapping/>
+  </p:clrMapOvr>
+</p:notes>
+</file>
+
+<file path=ppt/notesSlides/notesSlide5.xml><?xml version="1.0" encoding="utf-8"?>
+<p:notes xmlns:a="http://schemas.openxmlformats.org/drawingml/2006/main" xmlns:p="http://schemas.openxmlformats.org/presentationml/2006/main" xmlns:r="http://schemas.openxmlformats.org/officeDocument/2006/relationships">
+  <p:cSld>
+    <p:spTree>
+      <p:nvGrpSpPr>
+        <p:cNvPr id="1" name=""/>
+        <p:cNvGrpSpPr/>
+        <p:nvPr/>
+      </p:nvGrpSpPr>
+      <p:grpSpPr>
+        <a:xfrm>
+          <a:off x="0" y="0"/>
+          <a:ext cx="0" cy="0"/>
+          <a:chOff x="0" y="0"/>
+          <a:chExt cx="0" cy="0"/>
+        </a:xfrm>
+      </p:grpSpPr>
+      <p:sp>
+        <p:nvSpPr>
+          <p:cNvPr id="2" name="Slide Image Placeholder 1"/>
+          <p:cNvSpPr>
+            <a:spLocks noGrp="1"/>
+          </p:cNvSpPr>
+          <p:nvPr>
+            <p:ph type="sldImg" idx="2"/>
+          </p:nvPr>
+        </p:nvSpPr>
+        <p:spPr/>
+      </p:sp>
+      <p:sp>
+        <p:nvSpPr>
+          <p:cNvPr id="3" name="Notes Placeholder 2"/>
+          <p:cNvSpPr>
+            <a:spLocks noGrp="1"/>
+          </p:cNvSpPr>
+          <p:nvPr>
+            <p:ph type="body" idx="3" sz="quarter"/>
+          </p:nvPr>
+        </p:nvSpPr>
+        <p:spPr/>
+        <p:txBody>
+          <a:bodyPr/>
+          <a:lstStyle/>
+          <a:p>
+            <a:r>
+              <a:t>The churn case study stitches the chapter together: assemble behavioral features, explore and clean, train a classifier, and intervene before cancellation. Ranked feature importance highlights which behaviors precede churn; thresholded scores let retention teams act.</a:t>
+            </a:r>
+          </a:p>
+        </p:txBody>
+      </p:sp>
+      <p:sp>
+        <p:nvSpPr>
+          <p:cNvPr id="4" name="Slide Number Placeholder 3"/>
+          <p:cNvSpPr>
+            <a:spLocks noGrp="1"/>
+          </p:cNvSpPr>
+          <p:nvPr>
+            <p:ph type="sldNum" idx="5" sz="quarter"/>
+          </p:nvPr>
+        </p:nvSpPr>
+        <p:spPr/>
+      </p:sp>
+    </p:spTree>
+  </p:cSld>
+  <p:clrMapOvr>
+    <a:masterClrMapping/>
+  </p:clrMapOvr>
+</p:notes>
+</file>
+
+<file path=ppt/notesSlides/notesSlide6.xml><?xml version="1.0" encoding="utf-8"?>
+<p:notes xmlns:a="http://schemas.openxmlformats.org/drawingml/2006/main" xmlns:p="http://schemas.openxmlformats.org/presentationml/2006/main" xmlns:r="http://schemas.openxmlformats.org/officeDocument/2006/relationships">
+  <p:cSld>
+    <p:spTree>
+      <p:nvGrpSpPr>
+        <p:cNvPr id="1" name=""/>
+        <p:cNvGrpSpPr/>
+        <p:nvPr/>
+      </p:nvGrpSpPr>
+      <p:grpSpPr>
+        <a:xfrm>
+          <a:off x="0" y="0"/>
+          <a:ext cx="0" cy="0"/>
+          <a:chOff x="0" y="0"/>
+          <a:chExt cx="0" cy="0"/>
+        </a:xfrm>
+      </p:grpSpPr>
+      <p:sp>
+        <p:nvSpPr>
+          <p:cNvPr id="2" name="Slide Image Placeholder 1"/>
+          <p:cNvSpPr>
+            <a:spLocks noGrp="1"/>
+          </p:cNvSpPr>
+          <p:nvPr>
+            <p:ph type="sldImg" idx="2"/>
+          </p:nvPr>
+        </p:nvSpPr>
+        <p:spPr/>
+      </p:sp>
+      <p:sp>
+        <p:nvSpPr>
+          <p:cNvPr id="3" name="Notes Placeholder 2"/>
+          <p:cNvSpPr>
+            <a:spLocks noGrp="1"/>
+          </p:cNvSpPr>
+          <p:nvPr>
+            <p:ph type="body" idx="3" sz="quarter"/>
+          </p:nvPr>
+        </p:nvSpPr>
+        <p:spPr/>
+        <p:txBody>
+          <a:bodyPr/>
+          <a:lstStyle/>
+          <a:p>
+            <a:r>
+              <a:t>Example 1.31 provides a Python sketch of that pipeline. The same structure appears in fraud scoring and demand forecasting—only labels and the cost of errors change. Run the example 31 module when you want to see the code in action.</a:t>
+            </a:r>
+          </a:p>
+        </p:txBody>
+      </p:sp>
+      <p:sp>
+        <p:nvSpPr>
+          <p:cNvPr id="4" name="Slide Number Placeholder 3"/>
+          <p:cNvSpPr>
+            <a:spLocks noGrp="1"/>
+          </p:cNvSpPr>
+          <p:nvPr>
+            <p:ph type="sldNum" idx="5" sz="quarter"/>
+          </p:nvPr>
+        </p:nvSpPr>
+        <p:spPr/>
+      </p:sp>
+    </p:spTree>
+  </p:cSld>
+  <p:clrMapOvr>
+    <a:masterClrMapping/>
+  </p:clrMapOvr>
+</p:notes>
+</file>
+
+<file path=ppt/notesSlides/notesSlide7.xml><?xml version="1.0" encoding="utf-8"?>
+<p:notes xmlns:a="http://schemas.openxmlformats.org/drawingml/2006/main" xmlns:p="http://schemas.openxmlformats.org/presentationml/2006/main" xmlns:r="http://schemas.openxmlformats.org/officeDocument/2006/relationships">
+  <p:cSld>
+    <p:spTree>
+      <p:nvGrpSpPr>
+        <p:cNvPr id="1" name=""/>
+        <p:cNvGrpSpPr/>
+        <p:nvPr/>
+      </p:nvGrpSpPr>
+      <p:grpSpPr>
+        <a:xfrm>
+          <a:off x="0" y="0"/>
+          <a:ext cx="0" cy="0"/>
+          <a:chOff x="0" y="0"/>
+          <a:chExt cx="0" cy="0"/>
+        </a:xfrm>
+      </p:grpSpPr>
+      <p:sp>
+        <p:nvSpPr>
+          <p:cNvPr id="2" name="Slide Image Placeholder 1"/>
+          <p:cNvSpPr>
+            <a:spLocks noGrp="1"/>
+          </p:cNvSpPr>
+          <p:nvPr>
+            <p:ph type="sldImg" idx="2"/>
+          </p:nvPr>
+        </p:nvSpPr>
+        <p:spPr/>
+      </p:sp>
+      <p:sp>
+        <p:nvSpPr>
+          <p:cNvPr id="3" name="Notes Placeholder 2"/>
+          <p:cNvSpPr>
+            <a:spLocks noGrp="1"/>
+          </p:cNvSpPr>
+          <p:nvPr>
+            <p:ph type="body" idx="3" sz="quarter"/>
+          </p:nvPr>
+        </p:nvSpPr>
+        <p:spPr/>
+        <p:txBody>
+          <a:bodyPr/>
+          <a:lstStyle/>
+          <a:p>
+            <a:r>
+              <a:t>Domain vocabulary changes; the lifecycle does not. Quality and exploration feed every serious application. Churn is the chapter's end-to-end illustration of define, prepare, model, and intervene.</a:t>
+            </a:r>
+          </a:p>
+        </p:txBody>
+      </p:sp>
+      <p:sp>
+        <p:nvSpPr>
+          <p:cNvPr id="4" name="Slide Number Placeholder 3"/>
+          <p:cNvSpPr>
+            <a:spLocks noGrp="1"/>
+          </p:cNvSpPr>
+          <p:nvPr>
+            <p:ph type="sldNum" idx="5" sz="quarter"/>
+          </p:nvPr>
+        </p:nvSpPr>
+        <p:spPr/>
+      </p:sp>
+    </p:spTree>
+  </p:cSld>
+  <p:clrMapOvr>
+    <a:masterClrMapping/>
+  </p:clrMapOvr>
+</p:notes>
+</file>
+
+<file path=ppt/notesSlides/notesSlide8.xml><?xml version="1.0" encoding="utf-8"?>
+<p:notes xmlns:a="http://schemas.openxmlformats.org/drawingml/2006/main" xmlns:p="http://schemas.openxmlformats.org/presentationml/2006/main" xmlns:r="http://schemas.openxmlformats.org/officeDocument/2006/relationships">
+  <p:cSld>
+    <p:spTree>
+      <p:nvGrpSpPr>
+        <p:cNvPr id="1" name=""/>
+        <p:cNvGrpSpPr/>
+        <p:nvPr/>
+      </p:nvGrpSpPr>
+      <p:grpSpPr>
+        <a:xfrm>
+          <a:off x="0" y="0"/>
+          <a:ext cx="0" cy="0"/>
+          <a:chOff x="0" y="0"/>
+          <a:chExt cx="0" cy="0"/>
+        </a:xfrm>
+      </p:grpSpPr>
+      <p:sp>
+        <p:nvSpPr>
+          <p:cNvPr id="2" name="Slide Image Placeholder 1"/>
+          <p:cNvSpPr>
+            <a:spLocks noGrp="1"/>
+          </p:cNvSpPr>
+          <p:nvPr>
+            <p:ph type="sldImg" idx="2"/>
+          </p:nvPr>
+        </p:nvSpPr>
+        <p:spPr/>
+      </p:sp>
+      <p:sp>
+        <p:nvSpPr>
+          <p:cNvPr id="3" name="Notes Placeholder 2"/>
+          <p:cNvSpPr>
+            <a:spLocks noGrp="1"/>
+          </p:cNvSpPr>
+          <p:nvPr>
+            <p:ph type="body" idx="3" sz="quarter"/>
+          </p:nvPr>
+        </p:nvSpPr>
+        <p:spPr/>
+        <p:txBody>
+          <a:bodyPr/>
+          <a:lstStyle/>
+          <a:p>
+            <a:r>
+              <a:t>Complete the quiz, then finish the chapter with dataset management—versioning, access, and privacy that keep such pipelines trustworthy.</a:t>
             </a:r>
           </a:p>
         </p:txBody>
@@ -3660,7 +4062,7 @@
                 </a:solidFill>
                 <a:latin typeface="Calibri"/>
               </a:rPr>
-              <a:t>Where datasets create value—and one end-to-end workflow</a:t>
+              <a:t>Earlier clips answered what a dataset is and how to read one responsibly</a:t>
             </a:r>
           </a:p>
         </p:txBody>
@@ -3699,7 +4101,7 @@
               </a:defRPr>
             </a:pPr>
             <a:r>
-              <a:t>Chapter 1 — Uses Of Datasets</a:t>
+              <a:t>Chapter 1 — 06 Uses Of Datasets</a:t>
             </a:r>
           </a:p>
         </p:txBody>
@@ -3784,31 +4186,33 @@
           <a:lstStyle/>
           <a:p>
             <a:pPr>
+              <a:spcAft>
+                <a:spcPts val="1000"/>
+              </a:spcAft>
+              <a:buChar char="•"/>
               <a:lnSpc>
                 <a:spcPts val="2200"/>
               </a:lnSpc>
+            </a:pPr>
+            <a:r>
+              <a:rPr sz="2000" b="0">
+                <a:solidFill>
+                  <a:srgbClr val="333333"/>
+                </a:solidFill>
+                <a:latin typeface="Calibri"/>
+              </a:rPr>
+              <a:t>Map sectors to typical datasets and goals, recognize the shared lifecycle across domains</a:t>
+            </a:r>
+          </a:p>
+          <a:p>
+            <a:pPr>
               <a:spcAft>
                 <a:spcPts val="1000"/>
               </a:spcAft>
-            </a:pPr>
-            <a:r>
-              <a:rPr sz="2000" b="0">
-                <a:solidFill>
-                  <a:srgbClr val="333333"/>
-                </a:solidFill>
-                <a:latin typeface="Calibri"/>
-              </a:rPr>
-              <a:t>• Map sectors to typical datasets and analytical goals</a:t>
-            </a:r>
-          </a:p>
-          <a:p>
-            <a:pPr>
+              <a:buChar char="•"/>
               <a:lnSpc>
                 <a:spcPts val="2200"/>
               </a:lnSpc>
-              <a:spcAft>
-                <a:spcPts val="1000"/>
-              </a:spcAft>
             </a:pPr>
             <a:r>
               <a:rPr sz="2000" b="0">
@@ -3817,45 +4221,7 @@
                 </a:solidFill>
                 <a:latin typeface="Calibri"/>
               </a:rPr>
-              <a:t>• Trace the shared lifecycle: define, assess, explore,</a:t>
-            </a:r>
-          </a:p>
-          <a:p>
-            <a:pPr>
-              <a:lnSpc>
-                <a:spcPts val="2200"/>
-              </a:lnSpc>
-              <a:spcAft>
-                <a:spcPts val="1000"/>
-              </a:spcAft>
-            </a:pPr>
-            <a:r>
-              <a:rPr sz="2000" b="0">
-                <a:solidFill>
-                  <a:srgbClr val="333333"/>
-                </a:solidFill>
-                <a:latin typeface="Calibri"/>
-              </a:rPr>
-              <a:t>      act</a:t>
-            </a:r>
-          </a:p>
-          <a:p>
-            <a:pPr>
-              <a:lnSpc>
-                <a:spcPts val="2200"/>
-              </a:lnSpc>
-              <a:spcAft>
-                <a:spcPts val="1000"/>
-              </a:spcAft>
-            </a:pPr>
-            <a:r>
-              <a:rPr sz="2000" b="0">
-                <a:solidFill>
-                  <a:srgbClr val="333333"/>
-                </a:solidFill>
-                <a:latin typeface="Calibri"/>
-              </a:rPr>
-              <a:t>• Outline the customer-churn case study steps</a:t>
+              <a:t>Outline the steps in the customer-churn case study</a:t>
             </a:r>
           </a:p>
         </p:txBody>
@@ -3894,7 +4260,7 @@
               </a:defRPr>
             </a:pPr>
             <a:r>
-              <a:t>Chapter 1 — Uses Of Datasets</a:t>
+              <a:t>Chapter 1 — 06 Uses Of Datasets</a:t>
             </a:r>
           </a:p>
         </p:txBody>
@@ -3979,31 +4345,33 @@
           <a:lstStyle/>
           <a:p>
             <a:pPr>
+              <a:spcAft>
+                <a:spcPts val="1000"/>
+              </a:spcAft>
+              <a:buChar char="•"/>
               <a:lnSpc>
                 <a:spcPts val="2200"/>
               </a:lnSpc>
+            </a:pPr>
+            <a:r>
+              <a:rPr sz="2000" b="0">
+                <a:solidFill>
+                  <a:srgbClr val="333333"/>
+                </a:solidFill>
+                <a:latin typeface="Calibri"/>
+              </a:rPr>
+              <a:t>Use them to monitor performance, detect risk, or personalize services</a:t>
+            </a:r>
+          </a:p>
+          <a:p>
+            <a:pPr>
               <a:spcAft>
                 <a:spcPts val="1000"/>
               </a:spcAft>
-            </a:pPr>
-            <a:r>
-              <a:rPr sz="2000" b="0">
-                <a:solidFill>
-                  <a:srgbClr val="333333"/>
-                </a:solidFill>
-                <a:latin typeface="Calibri"/>
-              </a:rPr>
-              <a:t>• Retail: purchase histories → segmentation, forecasts</a:t>
-            </a:r>
-          </a:p>
-          <a:p>
-            <a:pPr>
+              <a:buChar char="•"/>
               <a:lnSpc>
                 <a:spcPts val="2200"/>
               </a:lnSpc>
-              <a:spcAft>
-                <a:spcPts val="1000"/>
-              </a:spcAft>
             </a:pPr>
             <a:r>
               <a:rPr sz="2000" b="0">
@@ -4012,64 +4380,7 @@
                 </a:solidFill>
                 <a:latin typeface="Calibri"/>
               </a:rPr>
-              <a:t>• Healthcare: EHRs and wearables → risk and monitoring</a:t>
-            </a:r>
-          </a:p>
-          <a:p>
-            <a:pPr>
-              <a:lnSpc>
-                <a:spcPts val="2200"/>
-              </a:lnSpc>
-              <a:spcAft>
-                <a:spcPts val="1000"/>
-              </a:spcAft>
-            </a:pPr>
-            <a:r>
-              <a:rPr sz="2000" b="0">
-                <a:solidFill>
-                  <a:srgbClr val="333333"/>
-                </a:solidFill>
-                <a:latin typeface="Calibri"/>
-              </a:rPr>
-              <a:t>• Finance: ledgers → fraud and credit scoring</a:t>
-            </a:r>
-          </a:p>
-          <a:p>
-            <a:pPr>
-              <a:lnSpc>
-                <a:spcPts val="2200"/>
-              </a:lnSpc>
-              <a:spcAft>
-                <a:spcPts val="1000"/>
-              </a:spcAft>
-            </a:pPr>
-            <a:r>
-              <a:rPr sz="2000" b="0">
-                <a:solidFill>
-                  <a:srgbClr val="333333"/>
-                </a:solidFill>
-                <a:latin typeface="Calibri"/>
-              </a:rPr>
-              <a:t>• Education and government: logs and statistics →</a:t>
-            </a:r>
-          </a:p>
-          <a:p>
-            <a:pPr>
-              <a:lnSpc>
-                <a:spcPts val="2200"/>
-              </a:lnSpc>
-              <a:spcAft>
-                <a:spcPts val="1000"/>
-              </a:spcAft>
-            </a:pPr>
-            <a:r>
-              <a:rPr sz="2000" b="0">
-                <a:solidFill>
-                  <a:srgbClr val="333333"/>
-                </a:solidFill>
-                <a:latin typeface="Calibri"/>
-              </a:rPr>
-              <a:t>      intervention and planning</a:t>
+              <a:t>Retail emphasizes purchase and clickstream data</a:t>
             </a:r>
           </a:p>
         </p:txBody>
@@ -4108,7 +4419,7 @@
               </a:defRPr>
             </a:pPr>
             <a:r>
-              <a:t>Chapter 1 — Uses Of Datasets</a:t>
+              <a:t>Chapter 1 — 06 Uses Of Datasets</a:t>
             </a:r>
           </a:p>
         </p:txBody>
@@ -4178,15 +4489,13 @@
         </p:nvSpPr>
         <p:spPr>
           <a:xfrm>
-            <a:off x="548640" y="1051560"/>
-            <a:ext cx="11064240" cy="914400"/>
+            <a:off x="548640" y="1234440"/>
+            <a:ext cx="11064240" cy="4937760"/>
           </a:xfrm>
           <a:prstGeom prst="rect">
             <a:avLst/>
           </a:prstGeom>
-          <a:solidFill>
-            <a:srgbClr val="F4F4F4"/>
-          </a:solidFill>
+          <a:noFill/>
         </p:spPr>
         <p:txBody>
           <a:bodyPr wrap="square">
@@ -4195,21 +4504,102 @@
           <a:lstStyle/>
           <a:p>
             <a:pPr>
+              <a:spcAft>
+                <a:spcPts val="1000"/>
+              </a:spcAft>
+              <a:buChar char="•"/>
               <a:lnSpc>
                 <a:spcPts val="2200"/>
               </a:lnSpc>
+            </a:pPr>
+            <a:r>
+              <a:rPr sz="2000" b="0">
+                <a:solidFill>
+                  <a:srgbClr val="333333"/>
+                </a:solidFill>
+                <a:latin typeface="Calibri"/>
+              </a:rPr>
+              <a:t>Example 1.21 — hands-on module</a:t>
+            </a:r>
+          </a:p>
+          <a:p>
+            <a:pPr>
               <a:spcAft>
-                <a:spcPts val="200"/>
+                <a:spcPts val="1000"/>
               </a:spcAft>
+              <a:buChar char="•"/>
+              <a:lnSpc>
+                <a:spcPts val="2200"/>
+              </a:lnSpc>
             </a:pPr>
             <a:r>
               <a:rPr sz="2000" b="0">
                 <a:solidFill>
                   <a:srgbClr val="333333"/>
                 </a:solidFill>
-                <a:latin typeface="Consolas"/>
+                <a:latin typeface="Calibri"/>
               </a:rPr>
-              <a:t>$ cd modules/chapter1/example21/ &amp;&amp; bash run.sh</a:t>
+              <a:t>Example 1.21 stores one row per order with customer, category, date, and amount</a:t>
+            </a:r>
+          </a:p>
+          <a:p>
+            <a:pPr>
+              <a:spcAft>
+                <a:spcPts val="1000"/>
+              </a:spcAft>
+              <a:buChar char="•"/>
+              <a:lnSpc>
+                <a:spcPts val="2200"/>
+              </a:lnSpc>
+            </a:pPr>
+            <a:r>
+              <a:rPr sz="2000" b="0">
+                <a:solidFill>
+                  <a:srgbClr val="333333"/>
+                </a:solidFill>
+                <a:latin typeface="Calibri"/>
+              </a:rPr>
+              <a:t>Aggregating by customer reveals repurchase intervals and category preferences that drive</a:t>
+            </a:r>
+          </a:p>
+          <a:p>
+            <a:pPr>
+              <a:spcAft>
+                <a:spcPts val="1000"/>
+              </a:spcAft>
+              <a:buChar char="•"/>
+              <a:lnSpc>
+                <a:spcPts val="2200"/>
+              </a:lnSpc>
+            </a:pPr>
+            <a:r>
+              <a:rPr sz="2000" b="0">
+                <a:solidFill>
+                  <a:srgbClr val="333333"/>
+                </a:solidFill>
+                <a:latin typeface="Calibri"/>
+              </a:rPr>
+              <a:t>Explore the chapter example module</a:t>
+            </a:r>
+          </a:p>
+          <a:p>
+            <a:pPr>
+              <a:spcAft>
+                <a:spcPts val="1000"/>
+              </a:spcAft>
+              <a:buChar char="•"/>
+              <a:lnSpc>
+                <a:spcPts val="2200"/>
+              </a:lnSpc>
+            </a:pPr>
+            <a:r>
+              <a:rPr sz="2000" b="0">
+                <a:solidFill>
+                  <a:srgbClr val="333333"/>
+                </a:solidFill>
+                <a:latin typeface="Calibri"/>
+              </a:rPr>
+              <a:t>View files: `modules/chapter1/example21/`</a:t>
             </a:r>
           </a:p>
         </p:txBody>
@@ -4248,7 +4638,7 @@
               </a:defRPr>
             </a:pPr>
             <a:r>
-              <a:t>Chapter 1 — Uses Of Datasets</a:t>
+              <a:t>Chapter 1 — 06 Uses Of Datasets</a:t>
             </a:r>
           </a:p>
         </p:txBody>
@@ -4333,31 +4723,33 @@
           <a:lstStyle/>
           <a:p>
             <a:pPr>
+              <a:spcAft>
+                <a:spcPts val="1000"/>
+              </a:spcAft>
+              <a:buChar char="•"/>
               <a:lnSpc>
                 <a:spcPts val="2200"/>
               </a:lnSpc>
+            </a:pPr>
+            <a:r>
+              <a:rPr sz="2000" b="0">
+                <a:solidFill>
+                  <a:srgbClr val="333333"/>
+                </a:solidFill>
+                <a:latin typeface="Calibri"/>
+              </a:rPr>
+              <a:t>The churn case study stitches the chapter together</a:t>
+            </a:r>
+          </a:p>
+          <a:p>
+            <a:pPr>
               <a:spcAft>
                 <a:spcPts val="1000"/>
               </a:spcAft>
-            </a:pPr>
-            <a:r>
-              <a:rPr sz="2000" b="0">
-                <a:solidFill>
-                  <a:srgbClr val="333333"/>
-                </a:solidFill>
-                <a:latin typeface="Calibri"/>
-              </a:rPr>
-              <a:t>• Collect and join customer behavior features</a:t>
-            </a:r>
-          </a:p>
-          <a:p>
-            <a:pPr>
+              <a:buChar char="•"/>
               <a:lnSpc>
                 <a:spcPts val="2200"/>
               </a:lnSpc>
-              <a:spcAft>
-                <a:spcPts val="1000"/>
-              </a:spcAft>
             </a:pPr>
             <a:r>
               <a:rPr sz="2000" b="0">
@@ -4366,64 +4758,7 @@
                 </a:solidFill>
                 <a:latin typeface="Calibri"/>
               </a:rPr>
-              <a:t>• Explore and clean before modeling</a:t>
-            </a:r>
-          </a:p>
-          <a:p>
-            <a:pPr>
-              <a:lnSpc>
-                <a:spcPts val="2200"/>
-              </a:lnSpc>
-              <a:spcAft>
-                <a:spcPts val="1000"/>
-              </a:spcAft>
-            </a:pPr>
-            <a:r>
-              <a:rPr sz="2000" b="0">
-                <a:solidFill>
-                  <a:srgbClr val="333333"/>
-                </a:solidFill>
-                <a:latin typeface="Calibri"/>
-              </a:rPr>
-              <a:t>• Train a classifier; score risk of cancellation</a:t>
-            </a:r>
-          </a:p>
-          <a:p>
-            <a:pPr>
-              <a:lnSpc>
-                <a:spcPts val="2200"/>
-              </a:lnSpc>
-              <a:spcAft>
-                <a:spcPts val="1000"/>
-              </a:spcAft>
-            </a:pPr>
-            <a:r>
-              <a:rPr sz="2000" b="0">
-                <a:solidFill>
-                  <a:srgbClr val="333333"/>
-                </a:solidFill>
-                <a:latin typeface="Calibri"/>
-              </a:rPr>
-              <a:t>• Act with retention offers guided by feature</a:t>
-            </a:r>
-          </a:p>
-          <a:p>
-            <a:pPr>
-              <a:lnSpc>
-                <a:spcPts val="2200"/>
-              </a:lnSpc>
-              <a:spcAft>
-                <a:spcPts val="1000"/>
-              </a:spcAft>
-            </a:pPr>
-            <a:r>
-              <a:rPr sz="2000" b="0">
-                <a:solidFill>
-                  <a:srgbClr val="333333"/>
-                </a:solidFill>
-                <a:latin typeface="Calibri"/>
-              </a:rPr>
-              <a:t>      importance</a:t>
+              <a:t>Ranked feature importance highlights which behaviors precede churn</a:t>
             </a:r>
           </a:p>
         </p:txBody>
@@ -4462,7 +4797,7 @@
               </a:defRPr>
             </a:pPr>
             <a:r>
-              <a:t>Chapter 1 — Uses Of Datasets</a:t>
+              <a:t>Chapter 1 — 06 Uses Of Datasets</a:t>
             </a:r>
           </a:p>
         </p:txBody>
@@ -4532,15 +4867,13 @@
         </p:nvSpPr>
         <p:spPr>
           <a:xfrm>
-            <a:off x="548640" y="1051560"/>
-            <a:ext cx="11064240" cy="914400"/>
+            <a:off x="548640" y="1234440"/>
+            <a:ext cx="11064240" cy="4937760"/>
           </a:xfrm>
           <a:prstGeom prst="rect">
             <a:avLst/>
           </a:prstGeom>
-          <a:solidFill>
-            <a:srgbClr val="F4F4F4"/>
-          </a:solidFill>
+          <a:noFill/>
         </p:spPr>
         <p:txBody>
           <a:bodyPr wrap="square">
@@ -4549,21 +4882,102 @@
           <a:lstStyle/>
           <a:p>
             <a:pPr>
+              <a:spcAft>
+                <a:spcPts val="1000"/>
+              </a:spcAft>
+              <a:buChar char="•"/>
               <a:lnSpc>
                 <a:spcPts val="2200"/>
               </a:lnSpc>
+            </a:pPr>
+            <a:r>
+              <a:rPr sz="2000" b="0">
+                <a:solidFill>
+                  <a:srgbClr val="333333"/>
+                </a:solidFill>
+                <a:latin typeface="Calibri"/>
+              </a:rPr>
+              <a:t>Example 1.31 — hands-on module</a:t>
+            </a:r>
+          </a:p>
+          <a:p>
+            <a:pPr>
               <a:spcAft>
-                <a:spcPts val="200"/>
+                <a:spcPts val="1000"/>
               </a:spcAft>
+              <a:buChar char="•"/>
+              <a:lnSpc>
+                <a:spcPts val="2200"/>
+              </a:lnSpc>
             </a:pPr>
             <a:r>
               <a:rPr sz="2000" b="0">
                 <a:solidFill>
                   <a:srgbClr val="333333"/>
                 </a:solidFill>
-                <a:latin typeface="Consolas"/>
+                <a:latin typeface="Calibri"/>
               </a:rPr>
-              <a:t>$ cd modules/chapter1/example31/ &amp;&amp; bash run.sh</a:t>
+              <a:t>Example 1.31 provides a Python sketch of that pipeline</a:t>
+            </a:r>
+          </a:p>
+          <a:p>
+            <a:pPr>
+              <a:spcAft>
+                <a:spcPts val="1000"/>
+              </a:spcAft>
+              <a:buChar char="•"/>
+              <a:lnSpc>
+                <a:spcPts val="2200"/>
+              </a:lnSpc>
+            </a:pPr>
+            <a:r>
+              <a:rPr sz="2000" b="0">
+                <a:solidFill>
+                  <a:srgbClr val="333333"/>
+                </a:solidFill>
+                <a:latin typeface="Calibri"/>
+              </a:rPr>
+              <a:t>The same structure appears in fraud scoring and demand forecasting</a:t>
+            </a:r>
+          </a:p>
+          <a:p>
+            <a:pPr>
+              <a:spcAft>
+                <a:spcPts val="1000"/>
+              </a:spcAft>
+              <a:buChar char="•"/>
+              <a:lnSpc>
+                <a:spcPts val="2200"/>
+              </a:lnSpc>
+            </a:pPr>
+            <a:r>
+              <a:rPr sz="2000" b="0">
+                <a:solidFill>
+                  <a:srgbClr val="333333"/>
+                </a:solidFill>
+                <a:latin typeface="Calibri"/>
+              </a:rPr>
+              <a:t>Explore the chapter example module</a:t>
+            </a:r>
+          </a:p>
+          <a:p>
+            <a:pPr>
+              <a:spcAft>
+                <a:spcPts val="1000"/>
+              </a:spcAft>
+              <a:buChar char="•"/>
+              <a:lnSpc>
+                <a:spcPts val="2200"/>
+              </a:lnSpc>
+            </a:pPr>
+            <a:r>
+              <a:rPr sz="2000" b="0">
+                <a:solidFill>
+                  <a:srgbClr val="333333"/>
+                </a:solidFill>
+                <a:latin typeface="Calibri"/>
+              </a:rPr>
+              <a:t>View files: `modules/chapter1/example31/`</a:t>
             </a:r>
           </a:p>
         </p:txBody>
@@ -4602,7 +5016,7 @@
               </a:defRPr>
             </a:pPr>
             <a:r>
-              <a:t>Chapter 1 — Uses Of Datasets</a:t>
+              <a:t>Chapter 1 — 06 Uses Of Datasets</a:t>
             </a:r>
           </a:p>
         </p:txBody>
@@ -4659,6 +5073,469 @@
                 </a:solidFill>
                 <a:latin typeface="Calibri"/>
               </a:rPr>
+              <a:t>Example 1.31 — listing</a:t>
+            </a:r>
+          </a:p>
+        </p:txBody>
+      </p:sp>
+      <p:sp>
+        <p:nvSpPr>
+          <p:cNvPr id="3" name="TextBox 2"/>
+          <p:cNvSpPr txBox="1"/>
+          <p:nvPr/>
+        </p:nvSpPr>
+        <p:spPr>
+          <a:xfrm>
+            <a:off x="548640" y="1143000"/>
+            <a:ext cx="11064240" cy="5029200"/>
+          </a:xfrm>
+          <a:prstGeom prst="rect">
+            <a:avLst/>
+          </a:prstGeom>
+          <a:solidFill>
+            <a:srgbClr val="F4F4F4"/>
+          </a:solidFill>
+        </p:spPr>
+        <p:txBody>
+          <a:bodyPr wrap="square">
+            <a:noAutofit/>
+          </a:bodyPr>
+          <a:lstStyle/>
+          <a:p>
+            <a:pPr>
+              <a:lnSpc>
+                <a:spcPts val="2200"/>
+              </a:lnSpc>
+              <a:spcAft>
+                <a:spcPts val="400"/>
+              </a:spcAft>
+            </a:pPr>
+            <a:r>
+              <a:rPr sz="2000" b="0">
+                <a:solidFill>
+                  <a:srgbClr val="333333"/>
+                </a:solidFill>
+                <a:latin typeface="Consolas"/>
+              </a:rPr>
+              <a:t>import pandas as pd</a:t>
+            </a:r>
+          </a:p>
+          <a:p>
+            <a:pPr>
+              <a:lnSpc>
+                <a:spcPts val="2200"/>
+              </a:lnSpc>
+              <a:spcAft>
+                <a:spcPts val="400"/>
+              </a:spcAft>
+            </a:pPr>
+            <a:r>
+              <a:rPr sz="2000" b="0">
+                <a:solidFill>
+                  <a:srgbClr val="333333"/>
+                </a:solidFill>
+                <a:latin typeface="Consolas"/>
+              </a:rPr>
+              <a:t>import numpy as np</a:t>
+            </a:r>
+          </a:p>
+          <a:p>
+            <a:pPr>
+              <a:lnSpc>
+                <a:spcPts val="2200"/>
+              </a:lnSpc>
+              <a:spcAft>
+                <a:spcPts val="400"/>
+              </a:spcAft>
+            </a:pPr>
+            <a:r>
+              <a:rPr sz="2000" b="0">
+                <a:solidFill>
+                  <a:srgbClr val="333333"/>
+                </a:solidFill>
+                <a:latin typeface="Consolas"/>
+              </a:rPr>
+              <a:t>from sklearn.ensemble import RandomForestClassifier</a:t>
+            </a:r>
+          </a:p>
+          <a:p>
+            <a:pPr>
+              <a:lnSpc>
+                <a:spcPts val="2200"/>
+              </a:lnSpc>
+              <a:spcAft>
+                <a:spcPts val="400"/>
+              </a:spcAft>
+            </a:pPr>
+            <a:r>
+              <a:rPr sz="2000" b="0">
+                <a:solidFill>
+                  <a:srgbClr val="333333"/>
+                </a:solidFill>
+                <a:latin typeface="Consolas"/>
+              </a:rPr>
+              <a:t>from sklearn.model_selection import train_test_split</a:t>
+            </a:r>
+          </a:p>
+          <a:p>
+            <a:pPr>
+              <a:lnSpc>
+                <a:spcPts val="2200"/>
+              </a:lnSpc>
+              <a:spcAft>
+                <a:spcPts val="400"/>
+              </a:spcAft>
+            </a:pPr>
+            <a:r>
+              <a:rPr sz="2000" b="0">
+                <a:solidFill>
+                  <a:srgbClr val="333333"/>
+                </a:solidFill>
+                <a:latin typeface="Consolas"/>
+              </a:rPr>
+              <a:t>from sklearn.impute import SimpleImputer</a:t>
+            </a:r>
+          </a:p>
+          <a:p>
+            <a:pPr>
+              <a:lnSpc>
+                <a:spcPts val="2200"/>
+              </a:lnSpc>
+              <a:spcAft>
+                <a:spcPts val="400"/>
+              </a:spcAft>
+            </a:pPr>
+            <a:r>
+              <a:rPr sz="2000" b="0">
+                <a:solidFill>
+                  <a:srgbClr val="333333"/>
+                </a:solidFill>
+                <a:latin typeface="Consolas"/>
+              </a:rPr>
+              <a:t>from sklearn.metrics import accuracy_score, precision_score,</a:t>
+            </a:r>
+          </a:p>
+          <a:p>
+            <a:pPr>
+              <a:lnSpc>
+                <a:spcPts val="2200"/>
+              </a:lnSpc>
+              <a:spcAft>
+                <a:spcPts val="400"/>
+              </a:spcAft>
+            </a:pPr>
+            <a:r>
+              <a:rPr sz="2000" b="0">
+                <a:solidFill>
+                  <a:srgbClr val="333333"/>
+                </a:solidFill>
+                <a:latin typeface="Consolas"/>
+              </a:rPr>
+              <a:t>recall_score, f1_score</a:t>
+            </a:r>
+          </a:p>
+          <a:p>
+            <a:pPr>
+              <a:lnSpc>
+                <a:spcPts val="2200"/>
+              </a:lnSpc>
+              <a:spcAft>
+                <a:spcPts val="400"/>
+              </a:spcAft>
+            </a:pPr>
+            <a:r>
+              <a:rPr sz="2000" b="0">
+                <a:solidFill>
+                  <a:srgbClr val="333333"/>
+                </a:solidFill>
+                <a:latin typeface="Consolas"/>
+              </a:rPr>
+              <a:t/>
+            </a:r>
+          </a:p>
+          <a:p>
+            <a:pPr>
+              <a:lnSpc>
+                <a:spcPts val="2200"/>
+              </a:lnSpc>
+              <a:spcAft>
+                <a:spcPts val="400"/>
+              </a:spcAft>
+            </a:pPr>
+            <a:r>
+              <a:rPr sz="2000" b="0">
+                <a:solidFill>
+                  <a:srgbClr val="333333"/>
+                </a:solidFill>
+                <a:latin typeface="Consolas"/>
+              </a:rPr>
+              <a:t># Sample dataset</a:t>
+            </a:r>
+          </a:p>
+          <a:p>
+            <a:pPr>
+              <a:lnSpc>
+                <a:spcPts val="2200"/>
+              </a:lnSpc>
+              <a:spcAft>
+                <a:spcPts val="400"/>
+              </a:spcAft>
+            </a:pPr>
+            <a:r>
+              <a:rPr sz="2000" b="0">
+                <a:solidFill>
+                  <a:srgbClr val="333333"/>
+                </a:solidFill>
+                <a:latin typeface="Consolas"/>
+              </a:rPr>
+              <a:t>data = {</a:t>
+            </a:r>
+          </a:p>
+          <a:p>
+            <a:pPr>
+              <a:lnSpc>
+                <a:spcPts val="2200"/>
+              </a:lnSpc>
+              <a:spcAft>
+                <a:spcPts val="400"/>
+              </a:spcAft>
+            </a:pPr>
+            <a:r>
+              <a:rPr sz="2000" b="0">
+                <a:solidFill>
+                  <a:srgbClr val="333333"/>
+                </a:solidFill>
+                <a:latin typeface="Consolas"/>
+              </a:rPr>
+              <a:t>    "Customer_ID": [1001, 1002, 1003, 1004, 1005, 1006, 1007, 1008,</a:t>
+            </a:r>
+          </a:p>
+          <a:p>
+            <a:pPr>
+              <a:lnSpc>
+                <a:spcPts val="2200"/>
+              </a:lnSpc>
+              <a:spcAft>
+                <a:spcPts val="400"/>
+              </a:spcAft>
+            </a:pPr>
+            <a:r>
+              <a:rPr sz="2000" b="0">
+                <a:solidFill>
+                  <a:srgbClr val="333333"/>
+                </a:solidFill>
+                <a:latin typeface="Consolas"/>
+              </a:rPr>
+              <a:t>1009, 1010],</a:t>
+            </a:r>
+          </a:p>
+          <a:p>
+            <a:pPr>
+              <a:lnSpc>
+                <a:spcPts val="2200"/>
+              </a:lnSpc>
+              <a:spcAft>
+                <a:spcPts val="400"/>
+              </a:spcAft>
+            </a:pPr>
+            <a:r>
+              <a:rPr sz="2000" b="0">
+                <a:solidFill>
+                  <a:srgbClr val="333333"/>
+                </a:solidFill>
+                <a:latin typeface="Consolas"/>
+              </a:rPr>
+              <a:t>    "Complaints": [2, 5, 8, 1, 3, 7, 0, 4, 6, 9],</a:t>
+            </a:r>
+          </a:p>
+          <a:p>
+            <a:pPr>
+              <a:lnSpc>
+                <a:spcPts val="2200"/>
+              </a:lnSpc>
+              <a:spcAft>
+                <a:spcPts val="400"/>
+              </a:spcAft>
+            </a:pPr>
+            <a:r>
+              <a:rPr sz="2000" b="0">
+                <a:solidFill>
+                  <a:srgbClr val="333333"/>
+                </a:solidFill>
+                <a:latin typeface="Consolas"/>
+              </a:rPr>
+              <a:t>    "Product_Usage": [50, 30, 20, 70, 45, 15, 80, 35, 25, 10],</a:t>
+            </a:r>
+          </a:p>
+          <a:p>
+            <a:pPr>
+              <a:lnSpc>
+                <a:spcPts val="2200"/>
+              </a:lnSpc>
+              <a:spcAft>
+                <a:spcPts val="400"/>
+              </a:spcAft>
+            </a:pPr>
+            <a:r>
+              <a:rPr sz="2000" b="0">
+                <a:solidFill>
+                  <a:srgbClr val="333333"/>
+                </a:solidFill>
+                <a:latin typeface="Consolas"/>
+              </a:rPr>
+              <a:t>    "Account_Activity_Change": [5, -10, -15, 8, -5, -20, 10, -7, -12,</a:t>
+            </a:r>
+          </a:p>
+          <a:p>
+            <a:pPr>
+              <a:lnSpc>
+                <a:spcPts val="2200"/>
+              </a:lnSpc>
+              <a:spcAft>
+                <a:spcPts val="400"/>
+              </a:spcAft>
+            </a:pPr>
+            <a:r>
+              <a:rPr sz="2000" b="0">
+                <a:solidFill>
+                  <a:srgbClr val="333333"/>
+                </a:solidFill>
+                <a:latin typeface="Consolas"/>
+              </a:rPr>
+              <a:t>-25],</a:t>
+            </a:r>
+          </a:p>
+          <a:p>
+            <a:pPr>
+              <a:lnSpc>
+                <a:spcPts val="2200"/>
+              </a:lnSpc>
+              <a:spcAft>
+                <a:spcPts val="400"/>
+              </a:spcAft>
+            </a:pPr>
+            <a:r>
+              <a:rPr sz="2000" b="0">
+                <a:solidFill>
+                  <a:srgbClr val="333333"/>
+                </a:solidFill>
+                <a:latin typeface="Consolas"/>
+              </a:rPr>
+              <a:t>    "Subscription_Length": [24, 36, 12, 48, 30, 6, 60, 28, 14, 10],</a:t>
+            </a:r>
+          </a:p>
+          <a:p>
+            <a:pPr>
+              <a:lnSpc>
+                <a:spcPts val="2200"/>
+              </a:lnSpc>
+              <a:spcAft>
+                <a:spcPts val="400"/>
+              </a:spcAft>
+            </a:pPr>
+            <a:r>
+              <a:rPr sz="2000" b="0">
+                <a:solidFill>
+                  <a:srgbClr val="333333"/>
+                </a:solidFill>
+                <a:latin typeface="Consolas"/>
+              </a:rPr>
+              <a:t>    "Churned": [0, 1, 1, 0, 0, 1, 0, 1, 1, 1]  # 1 = Churned, 0 = Not</a:t>
+            </a:r>
+          </a:p>
+        </p:txBody>
+      </p:sp>
+      <p:sp>
+        <p:nvSpPr>
+          <p:cNvPr id="4" name="TextBox 3"/>
+          <p:cNvSpPr txBox="1"/>
+          <p:nvPr/>
+        </p:nvSpPr>
+        <p:spPr>
+          <a:xfrm>
+            <a:off x="548640" y="6355080"/>
+            <a:ext cx="11064240" cy="320040"/>
+          </a:xfrm>
+          <a:prstGeom prst="rect">
+            <a:avLst/>
+          </a:prstGeom>
+          <a:noFill/>
+        </p:spPr>
+        <p:txBody>
+          <a:bodyPr wrap="square">
+            <a:noAutofit/>
+          </a:bodyPr>
+          <a:lstStyle/>
+          <a:p>
+            <a:pPr algn="r">
+              <a:lnSpc>
+                <a:spcPts val="2200"/>
+              </a:lnSpc>
+              <a:defRPr sz="1000" b="0">
+                <a:solidFill>
+                  <a:srgbClr val="666666"/>
+                </a:solidFill>
+                <a:latin typeface="Calibri"/>
+              </a:defRPr>
+            </a:pPr>
+            <a:r>
+              <a:t>Chapter 1 — 06 Uses Of Datasets</a:t>
+            </a:r>
+          </a:p>
+        </p:txBody>
+      </p:sp>
+    </p:spTree>
+  </p:cSld>
+  <p:clrMapOvr>
+    <a:masterClrMapping/>
+  </p:clrMapOvr>
+</p:sld>
+</file>
+
+<file path=ppt/slides/slide8.xml><?xml version="1.0" encoding="utf-8"?>
+<p:sld xmlns:a="http://schemas.openxmlformats.org/drawingml/2006/main" xmlns:p="http://schemas.openxmlformats.org/presentationml/2006/main" xmlns:r="http://schemas.openxmlformats.org/officeDocument/2006/relationships">
+  <p:cSld>
+    <p:spTree>
+      <p:nvGrpSpPr>
+        <p:cNvPr id="1" name=""/>
+        <p:cNvGrpSpPr/>
+        <p:nvPr/>
+      </p:nvGrpSpPr>
+      <p:grpSpPr/>
+      <p:sp>
+        <p:nvSpPr>
+          <p:cNvPr id="2" name="TextBox 1"/>
+          <p:cNvSpPr txBox="1"/>
+          <p:nvPr/>
+        </p:nvSpPr>
+        <p:spPr>
+          <a:xfrm>
+            <a:off x="548640" y="411480"/>
+            <a:ext cx="11064240" cy="777240"/>
+          </a:xfrm>
+          <a:prstGeom prst="rect">
+            <a:avLst/>
+          </a:prstGeom>
+          <a:noFill/>
+        </p:spPr>
+        <p:txBody>
+          <a:bodyPr wrap="square">
+            <a:noAutofit/>
+          </a:bodyPr>
+          <a:lstStyle/>
+          <a:p>
+            <a:pPr>
+              <a:lnSpc>
+                <a:spcPts val="2200"/>
+              </a:lnSpc>
+            </a:pPr>
+            <a:r>
+              <a:rPr sz="2800" b="1">
+                <a:solidFill>
+                  <a:srgbClr val="1A1A2E"/>
+                </a:solidFill>
+                <a:latin typeface="Calibri"/>
+              </a:rPr>
               <a:t>Takeaways</a:t>
             </a:r>
           </a:p>
@@ -4687,50 +5564,53 @@
           <a:lstStyle/>
           <a:p>
             <a:pPr>
+              <a:spcAft>
+                <a:spcPts val="1000"/>
+              </a:spcAft>
+              <a:buChar char="•"/>
               <a:lnSpc>
                 <a:spcPts val="2200"/>
               </a:lnSpc>
+            </a:pPr>
+            <a:r>
+              <a:rPr sz="2000" b="0">
+                <a:solidFill>
+                  <a:srgbClr val="333333"/>
+                </a:solidFill>
+                <a:latin typeface="Calibri"/>
+              </a:rPr>
+              <a:t>Domain vocabulary changes; the lifecycle does not</a:t>
+            </a:r>
+          </a:p>
+          <a:p>
+            <a:pPr>
               <a:spcAft>
                 <a:spcPts val="1000"/>
               </a:spcAft>
-            </a:pPr>
-            <a:r>
-              <a:rPr sz="2000" b="0">
-                <a:solidFill>
-                  <a:srgbClr val="333333"/>
-                </a:solidFill>
-                <a:latin typeface="Calibri"/>
-              </a:rPr>
-              <a:t>• Domain vocabulary changes; the lifecycle does not</a:t>
-            </a:r>
-          </a:p>
-          <a:p>
-            <a:pPr>
+              <a:buChar char="•"/>
               <a:lnSpc>
                 <a:spcPts val="2200"/>
               </a:lnSpc>
+            </a:pPr>
+            <a:r>
+              <a:rPr sz="2000" b="0">
+                <a:solidFill>
+                  <a:srgbClr val="333333"/>
+                </a:solidFill>
+                <a:latin typeface="Calibri"/>
+              </a:rPr>
+              <a:t>Quality and exploration feed every serious application</a:t>
+            </a:r>
+          </a:p>
+          <a:p>
+            <a:pPr>
               <a:spcAft>
                 <a:spcPts val="1000"/>
               </a:spcAft>
-            </a:pPr>
-            <a:r>
-              <a:rPr sz="2000" b="0">
-                <a:solidFill>
-                  <a:srgbClr val="333333"/>
-                </a:solidFill>
-                <a:latin typeface="Calibri"/>
-              </a:rPr>
-              <a:t>• Exploration and quality feed every serious</a:t>
-            </a:r>
-          </a:p>
-          <a:p>
-            <a:pPr>
+              <a:buChar char="•"/>
               <a:lnSpc>
                 <a:spcPts val="2200"/>
               </a:lnSpc>
-              <a:spcAft>
-                <a:spcPts val="1000"/>
-              </a:spcAft>
             </a:pPr>
             <a:r>
               <a:rPr sz="2000" b="0">
@@ -4739,26 +5619,7 @@
                 </a:solidFill>
                 <a:latin typeface="Calibri"/>
               </a:rPr>
-              <a:t>      application</a:t>
-            </a:r>
-          </a:p>
-          <a:p>
-            <a:pPr>
-              <a:lnSpc>
-                <a:spcPts val="2200"/>
-              </a:lnSpc>
-              <a:spcAft>
-                <a:spcPts val="1000"/>
-              </a:spcAft>
-            </a:pPr>
-            <a:r>
-              <a:rPr sz="2000" b="0">
-                <a:solidFill>
-                  <a:srgbClr val="333333"/>
-                </a:solidFill>
-                <a:latin typeface="Calibri"/>
-              </a:rPr>
-              <a:t>• Churn shows define → prepare → model → intervene</a:t>
+              <a:t>Churn is the chapter's end-to-end illustration of define, prepare, model, and intervene</a:t>
             </a:r>
           </a:p>
         </p:txBody>
@@ -4797,7 +5658,166 @@
               </a:defRPr>
             </a:pPr>
             <a:r>
-              <a:t>Chapter 1 — Uses Of Datasets</a:t>
+              <a:t>Chapter 1 — 06 Uses Of Datasets</a:t>
+            </a:r>
+          </a:p>
+        </p:txBody>
+      </p:sp>
+    </p:spTree>
+  </p:cSld>
+  <p:clrMapOvr>
+    <a:masterClrMapping/>
+  </p:clrMapOvr>
+</p:sld>
+</file>
+
+<file path=ppt/slides/slide9.xml><?xml version="1.0" encoding="utf-8"?>
+<p:sld xmlns:a="http://schemas.openxmlformats.org/drawingml/2006/main" xmlns:p="http://schemas.openxmlformats.org/presentationml/2006/main" xmlns:r="http://schemas.openxmlformats.org/officeDocument/2006/relationships">
+  <p:cSld>
+    <p:spTree>
+      <p:nvGrpSpPr>
+        <p:cNvPr id="1" name=""/>
+        <p:cNvGrpSpPr/>
+        <p:nvPr/>
+      </p:nvGrpSpPr>
+      <p:grpSpPr/>
+      <p:sp>
+        <p:nvSpPr>
+          <p:cNvPr id="2" name="TextBox 1"/>
+          <p:cNvSpPr txBox="1"/>
+          <p:nvPr/>
+        </p:nvSpPr>
+        <p:spPr>
+          <a:xfrm>
+            <a:off x="548640" y="411480"/>
+            <a:ext cx="11064240" cy="777240"/>
+          </a:xfrm>
+          <a:prstGeom prst="rect">
+            <a:avLst/>
+          </a:prstGeom>
+          <a:noFill/>
+        </p:spPr>
+        <p:txBody>
+          <a:bodyPr wrap="square">
+            <a:noAutofit/>
+          </a:bodyPr>
+          <a:lstStyle/>
+          <a:p>
+            <a:pPr>
+              <a:lnSpc>
+                <a:spcPts val="2200"/>
+              </a:lnSpc>
+            </a:pPr>
+            <a:r>
+              <a:rPr sz="2800" b="1">
+                <a:solidFill>
+                  <a:srgbClr val="1A1A2E"/>
+                </a:solidFill>
+                <a:latin typeface="Calibri"/>
+              </a:rPr>
+              <a:t>Next</a:t>
+            </a:r>
+          </a:p>
+        </p:txBody>
+      </p:sp>
+      <p:sp>
+        <p:nvSpPr>
+          <p:cNvPr id="3" name="TextBox 2"/>
+          <p:cNvSpPr txBox="1"/>
+          <p:nvPr/>
+        </p:nvSpPr>
+        <p:spPr>
+          <a:xfrm>
+            <a:off x="548640" y="1234440"/>
+            <a:ext cx="11064240" cy="4937760"/>
+          </a:xfrm>
+          <a:prstGeom prst="rect">
+            <a:avLst/>
+          </a:prstGeom>
+          <a:noFill/>
+        </p:spPr>
+        <p:txBody>
+          <a:bodyPr wrap="square">
+            <a:noAutofit/>
+          </a:bodyPr>
+          <a:lstStyle/>
+          <a:p>
+            <a:pPr>
+              <a:spcAft>
+                <a:spcPts val="1000"/>
+              </a:spcAft>
+              <a:buChar char="•"/>
+              <a:lnSpc>
+                <a:spcPts val="2200"/>
+              </a:lnSpc>
+            </a:pPr>
+            <a:r>
+              <a:rPr sz="2000" b="0">
+                <a:solidFill>
+                  <a:srgbClr val="333333"/>
+                </a:solidFill>
+                <a:latin typeface="Calibri"/>
+              </a:rPr>
+              <a:t>Complete the quiz for this clip</a:t>
+            </a:r>
+          </a:p>
+          <a:p>
+            <a:pPr>
+              <a:spcAft>
+                <a:spcPts val="1000"/>
+              </a:spcAft>
+              <a:buChar char="•"/>
+              <a:lnSpc>
+                <a:spcPts val="2200"/>
+              </a:lnSpc>
+            </a:pPr>
+            <a:r>
+              <a:rPr sz="2000" b="0">
+                <a:solidFill>
+                  <a:srgbClr val="333333"/>
+                </a:solidFill>
+                <a:latin typeface="Calibri"/>
+              </a:rPr>
+              <a:t>Complete the quiz, then finish the chapter with dataset management, versioning, access</a:t>
+            </a:r>
+          </a:p>
+        </p:txBody>
+      </p:sp>
+      <p:sp>
+        <p:nvSpPr>
+          <p:cNvPr id="4" name="TextBox 3"/>
+          <p:cNvSpPr txBox="1"/>
+          <p:nvPr/>
+        </p:nvSpPr>
+        <p:spPr>
+          <a:xfrm>
+            <a:off x="548640" y="6355080"/>
+            <a:ext cx="11064240" cy="320040"/>
+          </a:xfrm>
+          <a:prstGeom prst="rect">
+            <a:avLst/>
+          </a:prstGeom>
+          <a:noFill/>
+        </p:spPr>
+        <p:txBody>
+          <a:bodyPr wrap="square">
+            <a:noAutofit/>
+          </a:bodyPr>
+          <a:lstStyle/>
+          <a:p>
+            <a:pPr algn="r">
+              <a:lnSpc>
+                <a:spcPts val="2200"/>
+              </a:lnSpc>
+              <a:defRPr sz="1000" b="0">
+                <a:solidFill>
+                  <a:srgbClr val="666666"/>
+                </a:solidFill>
+                <a:latin typeface="Calibri"/>
+              </a:defRPr>
+            </a:pPr>
+            <a:r>
+              <a:t>Chapter 1 — 06 Uses Of Datasets</a:t>
             </a:r>
           </a:p>
         </p:txBody>
